--- a/presentations/PosterGRC.pptx
+++ b/presentations/PosterGRC.pptx
@@ -1713,7 +1713,7 @@
           <a:p>
             <a:fld id="{985D6BDF-9D0E-4E2B-85B8-D8F4790360C9}" type="datetimeFigureOut">
               <a:rPr lang="en-US" smtClean="0"/>
-              <a:t>6/3/26</a:t>
+              <a:t>6/9/26</a:t>
             </a:fld>
             <a:endParaRPr lang="en-US" dirty="0"/>
           </a:p>
@@ -1924,7 +1924,7 @@
           <a:p>
             <a:fld id="{985D6BDF-9D0E-4E2B-85B8-D8F4790360C9}" type="datetimeFigureOut">
               <a:rPr lang="en-US" smtClean="0"/>
-              <a:t>6/2/26</a:t>
+              <a:t>6/9/26</a:t>
             </a:fld>
             <a:endParaRPr lang="en-US" dirty="0"/>
           </a:p>
@@ -2304,8 +2304,8 @@
         </p:nvSpPr>
         <p:spPr>
           <a:xfrm>
-            <a:off x="22555200" y="16515516"/>
-            <a:ext cx="5723527" cy="3156257"/>
+            <a:off x="23080870" y="16515516"/>
+            <a:ext cx="5286778" cy="3156257"/>
           </a:xfrm>
           <a:prstGeom prst="roundRect">
             <a:avLst/>
@@ -2748,7 +2748,7 @@
                 </a:solidFill>
                 <a:latin typeface="+mn-lt"/>
               </a:rPr>
-              <a:t>Central New Mexico Community Collage    School of Math, Science, and Engineering</a:t>
+              <a:t>Central New Mexico Community College    School of Math, Science, and Engineering</a:t>
             </a:r>
           </a:p>
         </p:txBody>
@@ -3299,7 +3299,7 @@
                 <a:latin typeface="+mn-lt"/>
                 <a:cs typeface="Arial"/>
               </a:rPr>
-              <a:t>We analyze how static pile shape evolves with friction and how force-bearing structures -force chains- develop support.</a:t>
+              <a:t>We investigate how sliding, rolling, and twisting friction reorganize the force-chain backbone that supports granular piles.</a:t>
             </a:r>
           </a:p>
         </p:txBody>
@@ -3654,7 +3654,7 @@
         <p:spPr bwMode="auto">
           <a:xfrm>
             <a:off x="29277045" y="7440230"/>
-            <a:ext cx="12801600" cy="3693319"/>
+            <a:ext cx="12801600" cy="4801314"/>
           </a:xfrm>
           <a:prstGeom prst="rect">
             <a:avLst/>
@@ -3774,6 +3774,30 @@
             </a:lvl9pPr>
           </a:lstStyle>
           <a:p>
+            <a:pPr eaLnBrk="1" hangingPunct="1"/>
+            <a:r>
+              <a:rPr lang="en-US" sz="3600" b="1" i="1" dirty="0">
+                <a:solidFill>
+                  <a:prstClr val="black"/>
+                </a:solidFill>
+                <a:latin typeface="Calibri" pitchFamily="34" charset="0"/>
+              </a:rPr>
+              <a:t>Friction broadens the force-chain network while preserving </a:t>
+            </a:r>
+          </a:p>
+          <a:p>
+            <a:pPr eaLnBrk="1" hangingPunct="1"/>
+            <a:r>
+              <a:rPr lang="en-US" sz="3600" b="1" i="1" dirty="0">
+                <a:solidFill>
+                  <a:prstClr val="black"/>
+                </a:solidFill>
+                <a:latin typeface="Calibri" pitchFamily="34" charset="0"/>
+              </a:rPr>
+              <a:t>apex anchoring.</a:t>
+            </a:r>
+          </a:p>
+          <a:p>
             <a:pPr marL="571500" indent="-571500" eaLnBrk="1" hangingPunct="1">
               <a:buFont typeface="Arial" panose="020B0604020202020204" pitchFamily="34" charset="0"/>
               <a:buChar char="•"/>
@@ -3898,171 +3922,6 @@
               </a:rPr>
               <a:t>Chain count decreases, suggesting more connectivity.</a:t>
             </a:r>
-          </a:p>
-        </p:txBody>
-      </p:sp>
-      <p:sp>
-        <p:nvSpPr>
-          <p:cNvPr id="14" name="Text Box 193"/>
-          <p:cNvSpPr txBox="1">
-            <a:spLocks noChangeArrowheads="1"/>
-          </p:cNvSpPr>
-          <p:nvPr/>
-        </p:nvSpPr>
-        <p:spPr bwMode="auto">
-          <a:xfrm>
-            <a:off x="29420421" y="29779813"/>
-            <a:ext cx="12801600" cy="8402483"/>
-          </a:xfrm>
-          <a:prstGeom prst="rect">
-            <a:avLst/>
-          </a:prstGeom>
-          <a:solidFill>
-            <a:schemeClr val="bg1"/>
-          </a:solidFill>
-          <a:ln w="12700">
-            <a:solidFill>
-              <a:schemeClr val="accent1">
-                <a:lumMod val="75000"/>
-              </a:schemeClr>
-            </a:solidFill>
-          </a:ln>
-          <a:effectLst/>
-        </p:spPr>
-        <p:txBody>
-          <a:bodyPr lIns="182880" tIns="182880" rIns="182880" bIns="182880">
-            <a:noAutofit/>
-          </a:bodyPr>
-          <a:lstStyle>
-            <a:lvl1pPr eaLnBrk="0" hangingPunct="0">
-              <a:defRPr sz="2200">
-                <a:solidFill>
-                  <a:schemeClr val="tx1"/>
-                </a:solidFill>
-                <a:latin typeface="Arial" charset="0"/>
-              </a:defRPr>
-            </a:lvl1pPr>
-            <a:lvl2pPr marL="742950" indent="-285750" eaLnBrk="0" hangingPunct="0">
-              <a:defRPr sz="2200">
-                <a:solidFill>
-                  <a:schemeClr val="tx1"/>
-                </a:solidFill>
-                <a:latin typeface="Arial" charset="0"/>
-              </a:defRPr>
-            </a:lvl2pPr>
-            <a:lvl3pPr marL="1143000" indent="-228600" eaLnBrk="0" hangingPunct="0">
-              <a:defRPr sz="2200">
-                <a:solidFill>
-                  <a:schemeClr val="tx1"/>
-                </a:solidFill>
-                <a:latin typeface="Arial" charset="0"/>
-              </a:defRPr>
-            </a:lvl3pPr>
-            <a:lvl4pPr marL="1600200" indent="-228600" eaLnBrk="0" hangingPunct="0">
-              <a:defRPr sz="2200">
-                <a:solidFill>
-                  <a:schemeClr val="tx1"/>
-                </a:solidFill>
-                <a:latin typeface="Arial" charset="0"/>
-              </a:defRPr>
-            </a:lvl4pPr>
-            <a:lvl5pPr marL="2057400" indent="-228600" eaLnBrk="0" hangingPunct="0">
-              <a:defRPr sz="2200">
-                <a:solidFill>
-                  <a:schemeClr val="tx1"/>
-                </a:solidFill>
-                <a:latin typeface="Arial" charset="0"/>
-              </a:defRPr>
-            </a:lvl5pPr>
-            <a:lvl6pPr marL="2514600" indent="-228600" eaLnBrk="0" fontAlgn="base" hangingPunct="0">
-              <a:spcBef>
-                <a:spcPct val="0"/>
-              </a:spcBef>
-              <a:spcAft>
-                <a:spcPct val="0"/>
-              </a:spcAft>
-              <a:defRPr sz="2200">
-                <a:solidFill>
-                  <a:schemeClr val="tx1"/>
-                </a:solidFill>
-                <a:latin typeface="Arial" charset="0"/>
-              </a:defRPr>
-            </a:lvl6pPr>
-            <a:lvl7pPr marL="2971800" indent="-228600" eaLnBrk="0" fontAlgn="base" hangingPunct="0">
-              <a:spcBef>
-                <a:spcPct val="0"/>
-              </a:spcBef>
-              <a:spcAft>
-                <a:spcPct val="0"/>
-              </a:spcAft>
-              <a:defRPr sz="2200">
-                <a:solidFill>
-                  <a:schemeClr val="tx1"/>
-                </a:solidFill>
-                <a:latin typeface="Arial" charset="0"/>
-              </a:defRPr>
-            </a:lvl7pPr>
-            <a:lvl8pPr marL="3429000" indent="-228600" eaLnBrk="0" fontAlgn="base" hangingPunct="0">
-              <a:spcBef>
-                <a:spcPct val="0"/>
-              </a:spcBef>
-              <a:spcAft>
-                <a:spcPct val="0"/>
-              </a:spcAft>
-              <a:defRPr sz="2200">
-                <a:solidFill>
-                  <a:schemeClr val="tx1"/>
-                </a:solidFill>
-                <a:latin typeface="Arial" charset="0"/>
-              </a:defRPr>
-            </a:lvl8pPr>
-            <a:lvl9pPr marL="3886200" indent="-228600" eaLnBrk="0" fontAlgn="base" hangingPunct="0">
-              <a:spcBef>
-                <a:spcPct val="0"/>
-              </a:spcBef>
-              <a:spcAft>
-                <a:spcPct val="0"/>
-              </a:spcAft>
-              <a:defRPr sz="2200">
-                <a:solidFill>
-                  <a:schemeClr val="tx1"/>
-                </a:solidFill>
-                <a:latin typeface="Arial" charset="0"/>
-              </a:defRPr>
-            </a:lvl9pPr>
-          </a:lstStyle>
-          <a:p>
-            <a:pPr eaLnBrk="1" hangingPunct="1"/>
-            <a:r>
-              <a:rPr lang="en-US" sz="3600" dirty="0">
-                <a:latin typeface="+mn-lt"/>
-              </a:rPr>
-              <a:t>Mapping LAMMPS contact data onto an edge-betweenness graph network, we identify preferred transmission routes and transport-important contacts. We demonstrate that extended friction modes stabilize taller, steeper granular piles by reconfiguring the geometry of the stress transport backbone. </a:t>
-            </a:r>
-          </a:p>
-          <a:p>
-            <a:pPr eaLnBrk="1" hangingPunct="1"/>
-            <a:r>
-              <a:rPr lang="en-US" sz="3600" dirty="0">
-                <a:latin typeface="+mn-lt"/>
-              </a:rPr>
-              <a:t>Increasing rolling and twisting friction changes the contact-network texture, producing force chains that are more tortuous, more angled, and spatially distributed, expanding radially outward at the pile base, while remaining anchored at the apex. The load-bearing pathways become less centrally concentrated, and geometrically more complex.</a:t>
-            </a:r>
-          </a:p>
-          <a:p>
-            <a:pPr eaLnBrk="1" hangingPunct="1"/>
-            <a:r>
-              <a:rPr lang="en-US" sz="3600" dirty="0">
-                <a:latin typeface="+mn-lt"/>
-              </a:rPr>
-              <a:t>This behavior is consistent with experimental observations that granular force transmission depends strongly on contact-network texture and anisotropy, suggesting that friction promotes arching and redistributes load through a broader force-chain network.</a:t>
-            </a:r>
-          </a:p>
-          <a:p>
-            <a:pPr eaLnBrk="1" hangingPunct="1"/>
-            <a:endParaRPr lang="en-US" sz="3600" dirty="0">
-              <a:latin typeface="+mn-lt"/>
-            </a:endParaRPr>
           </a:p>
         </p:txBody>
       </p:sp>
@@ -4074,7 +3933,7 @@
         </p:nvSpPr>
         <p:spPr>
           <a:xfrm>
-            <a:off x="29373020" y="28727400"/>
+            <a:off x="29032200" y="29641800"/>
             <a:ext cx="12801600" cy="914400"/>
           </a:xfrm>
           <a:prstGeom prst="rect">
@@ -4305,7 +4164,7 @@
         <p:spPr bwMode="auto">
           <a:xfrm>
             <a:off x="15683421" y="15925800"/>
-            <a:ext cx="6804893" cy="5355312"/>
+            <a:ext cx="7206151" cy="6463308"/>
           </a:xfrm>
           <a:prstGeom prst="rect">
             <a:avLst/>
@@ -4431,8 +4290,25 @@
               <a:defRPr/>
             </a:pPr>
             <a:r>
-              <a:rPr lang="en-US" sz="3600" b="1" dirty="0"/>
-              <a:t>Isolating Maximum-Load Pathways via Inverse-Force Edge Betweenness:</a:t>
+              <a:rPr lang="en-US" sz="3600" b="1" dirty="0">
+                <a:latin typeface="Calibri" pitchFamily="34" charset="0"/>
+              </a:rPr>
+              <a:t>EBC </a:t>
+            </a:r>
+            <a:r>
+              <a:rPr lang="en-US" sz="3600" b="1" dirty="0">
+                <a:latin typeface="+mn-lt"/>
+              </a:rPr>
+              <a:t>(Brandes, 2001)</a:t>
+            </a:r>
+            <a:r>
+              <a:rPr lang="en-US" sz="3600" dirty="0">
+                <a:solidFill>
+                  <a:prstClr val="black"/>
+                </a:solidFill>
+                <a:latin typeface="Calibri" pitchFamily="34" charset="0"/>
+              </a:rPr>
+              <a:t> quantifies how often a contact lies on force-preferred pathways through the contact network.</a:t>
             </a:r>
           </a:p>
           <a:p>
@@ -4441,37 +4317,84 @@
               <a:buChar char="•"/>
               <a:defRPr/>
             </a:pPr>
-            <a:endParaRPr lang="en-US" sz="3600" b="1" dirty="0">
-              <a:latin typeface="Calibri" pitchFamily="34" charset="0"/>
-            </a:endParaRPr>
-          </a:p>
-          <a:p>
-            <a:pPr marL="571500" lvl="0" indent="-571500" eaLnBrk="1" hangingPunct="1">
+            <a:r>
+              <a:rPr lang="en-US" sz="3600" dirty="0">
+                <a:solidFill>
+                  <a:prstClr val="black"/>
+                </a:solidFill>
+                <a:latin typeface="Calibri" pitchFamily="34" charset="0"/>
+              </a:rPr>
+              <a:t>High-EBC contacts </a:t>
+            </a:r>
+          </a:p>
+          <a:p>
+            <a:pPr lvl="1" indent="0" eaLnBrk="1" hangingPunct="1">
+              <a:defRPr/>
+            </a:pPr>
+            <a:r>
+              <a:rPr lang="en-US" sz="3600" dirty="0">
+                <a:solidFill>
+                  <a:prstClr val="black"/>
+                </a:solidFill>
+                <a:latin typeface="Calibri" pitchFamily="34" charset="0"/>
+              </a:rPr>
+              <a:t>-carry many force-preferred routes </a:t>
+            </a:r>
+          </a:p>
+          <a:p>
+            <a:pPr lvl="1" indent="0" eaLnBrk="1" hangingPunct="1">
+              <a:defRPr/>
+            </a:pPr>
+            <a:r>
+              <a:rPr lang="en-US" sz="3600" dirty="0">
+                <a:solidFill>
+                  <a:prstClr val="black"/>
+                </a:solidFill>
+                <a:latin typeface="Calibri" pitchFamily="34" charset="0"/>
+              </a:rPr>
+              <a:t>-connect distant regions</a:t>
+            </a:r>
+          </a:p>
+          <a:p>
+            <a:pPr lvl="1" indent="0" eaLnBrk="1" hangingPunct="1">
+              <a:defRPr/>
+            </a:pPr>
+            <a:r>
+              <a:rPr lang="en-US" sz="3600" dirty="0">
+                <a:solidFill>
+                  <a:prstClr val="black"/>
+                </a:solidFill>
+                <a:latin typeface="Calibri" pitchFamily="34" charset="0"/>
+              </a:rPr>
+              <a:t>-critical for stress transmission</a:t>
+            </a:r>
+          </a:p>
+          <a:p>
+            <a:pPr lvl="1" indent="0" eaLnBrk="1" hangingPunct="1">
+              <a:defRPr/>
+            </a:pPr>
+            <a:r>
+              <a:rPr lang="en-US" sz="3600" dirty="0">
+                <a:solidFill>
+                  <a:prstClr val="black"/>
+                </a:solidFill>
+                <a:latin typeface="Calibri" pitchFamily="34" charset="0"/>
+              </a:rPr>
+              <a:t>-system-wide</a:t>
+            </a:r>
+          </a:p>
+          <a:p>
+            <a:pPr marL="571500" indent="-571500" eaLnBrk="1" hangingPunct="1">
               <a:buFont typeface="Arial" panose="020B0604020202020204" pitchFamily="34" charset="0"/>
               <a:buChar char="•"/>
               <a:defRPr/>
             </a:pPr>
-            <a:r>
-              <a:rPr lang="en-US" sz="3600" b="1" dirty="0">
-                <a:latin typeface="Calibri" pitchFamily="34" charset="0"/>
-              </a:rPr>
-              <a:t>EBC </a:t>
-            </a:r>
-            <a:r>
-              <a:rPr lang="en-US" sz="3600" b="1" dirty="0">
-                <a:latin typeface="+mn-lt"/>
-              </a:rPr>
-              <a:t>(Brandes, 2001)</a:t>
-            </a:r>
-            <a:r>
-              <a:rPr lang="en-US" sz="3600" dirty="0">
-                <a:solidFill>
-                  <a:prstClr val="black"/>
-                </a:solidFill>
-                <a:latin typeface="Calibri" pitchFamily="34" charset="0"/>
-              </a:rPr>
-              <a:t> measures how frequently an edge participates in shortest transport paths through the network.</a:t>
-            </a:r>
+            <a:endParaRPr lang="en-US" sz="3600" dirty="0">
+              <a:solidFill>
+                <a:prstClr val="black"/>
+              </a:solidFill>
+              <a:latin typeface="Calibri" pitchFamily="34" charset="0"/>
+            </a:endParaRPr>
           </a:p>
         </p:txBody>
       </p:sp>
@@ -4491,8 +4414,8 @@
         </p:nvSpPr>
         <p:spPr bwMode="auto">
           <a:xfrm>
-            <a:off x="15621000" y="22533888"/>
-            <a:ext cx="6858000" cy="8125301"/>
+            <a:off x="15621000" y="23345299"/>
+            <a:ext cx="6858000" cy="5355312"/>
           </a:xfrm>
           <a:prstGeom prst="rect">
             <a:avLst/>
@@ -4680,69 +4603,6 @@
               <a:t>from the background contact network.</a:t>
             </a:r>
           </a:p>
-          <a:p>
-            <a:pPr marL="571500" indent="-571500" eaLnBrk="1" hangingPunct="1">
-              <a:buFont typeface="Arial" panose="020B0604020202020204" pitchFamily="34" charset="0"/>
-              <a:buChar char="•"/>
-            </a:pPr>
-            <a:endParaRPr lang="en-US" sz="3600" dirty="0">
-              <a:solidFill>
-                <a:srgbClr val="000000"/>
-              </a:solidFill>
-              <a:latin typeface="+mn-lt"/>
-            </a:endParaRPr>
-          </a:p>
-          <a:p>
-            <a:pPr marL="571500" indent="-571500" eaLnBrk="1" hangingPunct="1">
-              <a:buFont typeface="Arial" panose="020B0604020202020204" pitchFamily="34" charset="0"/>
-              <a:buChar char="•"/>
-            </a:pPr>
-            <a:endParaRPr lang="en-US" sz="3600" b="0" i="0" u="none" strike="noStrike" dirty="0">
-              <a:solidFill>
-                <a:srgbClr val="000000"/>
-              </a:solidFill>
-              <a:effectLst/>
-              <a:latin typeface="+mn-lt"/>
-            </a:endParaRPr>
-          </a:p>
-          <a:p>
-            <a:pPr marL="571500" indent="-571500" eaLnBrk="1" hangingPunct="1">
-              <a:buFont typeface="Arial" panose="020B0604020202020204" pitchFamily="34" charset="0"/>
-              <a:buChar char="•"/>
-            </a:pPr>
-            <a:endParaRPr lang="en-US" sz="3600" dirty="0">
-              <a:solidFill>
-                <a:srgbClr val="000000"/>
-              </a:solidFill>
-              <a:latin typeface="+mn-lt"/>
-            </a:endParaRPr>
-          </a:p>
-          <a:p>
-            <a:pPr marL="571500" indent="-571500" eaLnBrk="1" hangingPunct="1">
-              <a:buFont typeface="Arial" panose="020B0604020202020204" pitchFamily="34" charset="0"/>
-              <a:buChar char="•"/>
-            </a:pPr>
-            <a:endParaRPr lang="en-US" sz="3600" b="0" i="0" u="none" strike="noStrike" dirty="0">
-              <a:solidFill>
-                <a:srgbClr val="000000"/>
-              </a:solidFill>
-              <a:effectLst/>
-              <a:latin typeface="+mn-lt"/>
-            </a:endParaRPr>
-          </a:p>
-          <a:p>
-            <a:pPr marL="571500" indent="-571500" eaLnBrk="1" hangingPunct="1">
-              <a:buFont typeface="Arial" panose="020B0604020202020204" pitchFamily="34" charset="0"/>
-              <a:buChar char="•"/>
-            </a:pPr>
-            <a:endParaRPr lang="en-US" sz="3600" b="0" i="0" u="none" strike="noStrike" dirty="0">
-              <a:solidFill>
-                <a:srgbClr val="000000"/>
-              </a:solidFill>
-              <a:effectLst/>
-              <a:latin typeface="+mn-lt"/>
-            </a:endParaRPr>
-          </a:p>
         </p:txBody>
       </p:sp>
       <p:sp>
@@ -4761,7 +4621,7 @@
         </p:nvSpPr>
         <p:spPr bwMode="auto">
           <a:xfrm>
-            <a:off x="15621000" y="29052084"/>
+            <a:off x="15621000" y="29814083"/>
             <a:ext cx="6828698" cy="4247317"/>
           </a:xfrm>
           <a:prstGeom prst="rect">
@@ -4974,8 +4834,8 @@
         </p:nvSpPr>
         <p:spPr bwMode="auto">
           <a:xfrm>
-            <a:off x="15621000" y="34449516"/>
-            <a:ext cx="6498588" cy="3955284"/>
+            <a:off x="15621000" y="35225920"/>
+            <a:ext cx="6498588" cy="3178880"/>
           </a:xfrm>
           <a:prstGeom prst="rect">
             <a:avLst/>
@@ -5100,7 +4960,7 @@
               <a:rPr lang="en-US" sz="3600" b="1" dirty="0">
                 <a:latin typeface="Calibri" pitchFamily="34" charset="0"/>
               </a:rPr>
-              <a:t>Traditional force-chain methods</a:t>
+              <a:t>Traditional </a:t>
             </a:r>
           </a:p>
           <a:p>
@@ -5112,7 +4972,7 @@
               <a:rPr lang="en-US" sz="3600" dirty="0">
                 <a:latin typeface="Calibri" pitchFamily="34" charset="0"/>
               </a:rPr>
-              <a:t>Threshold: Above average force.</a:t>
+              <a:t>Force threshold</a:t>
             </a:r>
           </a:p>
           <a:p>
@@ -5124,19 +4984,7 @@
               <a:rPr lang="en-US" sz="3600" dirty="0">
                 <a:latin typeface="Calibri" pitchFamily="34" charset="0"/>
               </a:rPr>
-              <a:t>Force direction: force load vector alignment (&lt;45°)</a:t>
-            </a:r>
-          </a:p>
-          <a:p>
-            <a:pPr marL="571500" indent="-571500" eaLnBrk="1" hangingPunct="1">
-              <a:buFont typeface="Arial" panose="020B0604020202020204" pitchFamily="34" charset="0"/>
-              <a:buChar char="•"/>
-            </a:pPr>
-            <a:r>
-              <a:rPr lang="en-US" sz="3600" dirty="0">
-                <a:latin typeface="Calibri" pitchFamily="34" charset="0"/>
-              </a:rPr>
-              <a:t>Local force criterion</a:t>
+              <a:t>Local alignment</a:t>
             </a:r>
           </a:p>
         </p:txBody>
@@ -5341,7 +5189,7 @@
         </p:nvSpPr>
         <p:spPr>
           <a:xfrm>
-            <a:off x="15623091" y="21305520"/>
+            <a:off x="15623091" y="22219920"/>
             <a:ext cx="1097280" cy="1097280"/>
           </a:xfrm>
           <a:prstGeom prst="rect">
@@ -5761,7 +5609,7 @@
         </p:nvSpPr>
         <p:spPr>
           <a:xfrm>
-            <a:off x="16764000" y="21381720"/>
+            <a:off x="16764000" y="22219920"/>
             <a:ext cx="11620500" cy="1097280"/>
           </a:xfrm>
           <a:prstGeom prst="rect">
@@ -5798,7 +5646,7 @@
                   </a:schemeClr>
                 </a:solidFill>
               </a:rPr>
-              <a:t>IDENTIFICATION OF HIGH IMPORTANCE FORCE CHAINS USING CHANGE POINT DETECTION</a:t>
+              <a:t>IDENTIFICATION OF HIGH IMPORTANCE FORCE  CHAINS USING CHANGE POINT DETECTION</a:t>
             </a:r>
           </a:p>
         </p:txBody>
@@ -5817,7 +5665,7 @@
         </p:nvSpPr>
         <p:spPr>
           <a:xfrm>
-            <a:off x="16764000" y="27934920"/>
+            <a:off x="16764000" y="28696919"/>
             <a:ext cx="11620500" cy="1097280"/>
           </a:xfrm>
           <a:prstGeom prst="rect">
@@ -5873,7 +5721,7 @@
         </p:nvSpPr>
         <p:spPr>
           <a:xfrm>
-            <a:off x="15598140" y="33345120"/>
+            <a:off x="15598140" y="34107120"/>
             <a:ext cx="12824460" cy="1097280"/>
           </a:xfrm>
           <a:prstGeom prst="rect">
@@ -5911,13 +5759,13 @@
                   </a:schemeClr>
                 </a:solidFill>
               </a:rPr>
-              <a:t>TRADITIONAL VS BETWEENNESS METHODS</a:t>
+              <a:t>TRADITIONAL vs EBC APPROACH</a:t>
             </a:r>
           </a:p>
         </p:txBody>
       </p:sp>
-      <mc:AlternateContent xmlns:mc="http://schemas.openxmlformats.org/markup-compatibility/2006">
-        <mc:Choice xmlns:a14="http://schemas.microsoft.com/office/drawing/2010/main" Requires="a14">
+      <mc:AlternateContent xmlns:mc="http://schemas.openxmlformats.org/markup-compatibility/2006" xmlns:a14="http://schemas.microsoft.com/office/drawing/2010/main">
+        <mc:Choice Requires="a14">
           <p:sp>
             <p:nvSpPr>
               <p:cNvPr id="57" name="TextBox 56">
@@ -5932,7 +5780,7 @@
             </p:nvSpPr>
             <p:spPr>
               <a:xfrm>
-                <a:off x="18753465" y="12344399"/>
+                <a:off x="18753465" y="12115800"/>
                 <a:ext cx="4030925" cy="1163460"/>
               </a:xfrm>
               <a:prstGeom prst="rect">
@@ -6036,7 +5884,7 @@
             </p:txBody>
           </p:sp>
         </mc:Choice>
-        <mc:Fallback>
+        <mc:Fallback xmlns="">
           <p:sp>
             <p:nvSpPr>
               <p:cNvPr id="57" name="TextBox 56">
@@ -6053,7 +5901,7 @@
             </p:nvSpPr>
             <p:spPr>
               <a:xfrm>
-                <a:off x="18753465" y="12344399"/>
+                <a:off x="18753465" y="12115800"/>
                 <a:ext cx="4030925" cy="1163460"/>
               </a:xfrm>
               <a:prstGeom prst="rect">
@@ -6095,8 +5943,8 @@
         </p:nvSpPr>
         <p:spPr>
           <a:xfrm>
-            <a:off x="16229331" y="13763017"/>
-            <a:ext cx="7659406" cy="646331"/>
+            <a:off x="15727678" y="13430071"/>
+            <a:ext cx="9494522" cy="1200329"/>
           </a:xfrm>
           <a:prstGeom prst="rect">
             <a:avLst/>
@@ -6111,15 +5959,7 @@
           <a:p>
             <a:r>
               <a:rPr lang="en-US" sz="3600" b="1" dirty="0"/>
-              <a:t>Strong contact-&gt;low-cost path-&gt;</a:t>
-            </a:r>
-            <a:r>
-              <a:rPr lang="en-US" sz="3600" b="1" i="1" dirty="0"/>
-              <a:t>critical</a:t>
-            </a:r>
-            <a:r>
-              <a:rPr lang="en-US" sz="3600" b="1" dirty="0"/>
-              <a:t> </a:t>
+              <a:t>Strong contacts correspond to low-cost paths and therefore dominate shortest-path transport.</a:t>
             </a:r>
           </a:p>
         </p:txBody>
@@ -8603,8 +8443,8 @@
           </p:txBody>
         </p:sp>
       </p:grpSp>
-      <mc:AlternateContent xmlns:mc="http://schemas.openxmlformats.org/markup-compatibility/2006">
-        <mc:Choice xmlns:a14="http://schemas.microsoft.com/office/drawing/2010/main" Requires="a14">
+      <mc:AlternateContent xmlns:mc="http://schemas.openxmlformats.org/markup-compatibility/2006" xmlns:a14="http://schemas.microsoft.com/office/drawing/2010/main">
+        <mc:Choice Requires="a14">
           <p:sp>
             <p:nvSpPr>
               <p:cNvPr id="182" name="TextBox 181">
@@ -8619,7 +8459,7 @@
             </p:nvSpPr>
             <p:spPr>
               <a:xfrm>
-                <a:off x="22860000" y="17110264"/>
+                <a:off x="23176923" y="17110264"/>
                 <a:ext cx="5190725" cy="2015936"/>
               </a:xfrm>
               <a:prstGeom prst="rect">
@@ -8817,7 +8657,7 @@
             </p:txBody>
           </p:sp>
         </mc:Choice>
-        <mc:Fallback>
+        <mc:Fallback xmlns="">
           <p:sp>
             <p:nvSpPr>
               <p:cNvPr id="182" name="TextBox 181">
@@ -8834,7 +8674,7 @@
             </p:nvSpPr>
             <p:spPr>
               <a:xfrm>
-                <a:off x="22860000" y="17110264"/>
+                <a:off x="23176923" y="17110264"/>
                 <a:ext cx="5190725" cy="2015936"/>
               </a:xfrm>
               <a:prstGeom prst="rect">
@@ -8843,7 +8683,7 @@
               <a:blipFill>
                 <a:blip r:embed="rId6"/>
                 <a:stretch>
-                  <a:fillRect l="-11736" t="-147500" r="-3912" b="-203750"/>
+                  <a:fillRect l="-11707" t="-147500" r="-3902" b="-203750"/>
                 </a:stretch>
               </a:blipFill>
               <a:ln>
@@ -8865,8 +8705,8 @@
           </p:sp>
         </mc:Fallback>
       </mc:AlternateContent>
-      <mc:AlternateContent xmlns:mc="http://schemas.openxmlformats.org/markup-compatibility/2006">
-        <mc:Choice xmlns:a14="http://schemas.microsoft.com/office/drawing/2010/main" Requires="a14">
+      <mc:AlternateContent xmlns:mc="http://schemas.openxmlformats.org/markup-compatibility/2006" xmlns:a14="http://schemas.microsoft.com/office/drawing/2010/main">
+        <mc:Choice Requires="a14">
           <p:sp>
             <p:nvSpPr>
               <p:cNvPr id="184" name="TextBox 183">
@@ -8881,8 +8721,8 @@
             </p:nvSpPr>
             <p:spPr>
               <a:xfrm>
-                <a:off x="22581177" y="19812000"/>
-                <a:ext cx="5723527" cy="707886"/>
+                <a:off x="23270573" y="19828014"/>
+                <a:ext cx="4771027" cy="1323439"/>
               </a:xfrm>
               <a:prstGeom prst="rect">
                 <a:avLst/>
@@ -8909,6 +8749,7 @@
                       <m:sSubPr>
                         <m:ctrlPr>
                           <a:rPr lang="en-US" sz="2000" i="1" smtClean="0">
+                            <a:latin typeface="Cambria Math" panose="02040503050406030204" pitchFamily="18" charset="0"/>
                             <a:ea typeface="Cambria Math" panose="02040503050406030204" pitchFamily="18" charset="0"/>
                           </a:rPr>
                         </m:ctrlPr>
@@ -8916,6 +8757,7 @@
                       <m:e>
                         <m:r>
                           <a:rPr lang="en-US" sz="2000" i="1">
+                            <a:latin typeface="Cambria Math" panose="02040503050406030204" pitchFamily="18" charset="0"/>
                             <a:ea typeface="Cambria Math" panose="02040503050406030204" pitchFamily="18" charset="0"/>
                           </a:rPr>
                           <m:t>𝜎</m:t>
@@ -8924,6 +8766,7 @@
                       <m:sub>
                         <m:r>
                           <a:rPr lang="en-US" sz="2000" i="1">
+                            <a:latin typeface="Cambria Math" panose="02040503050406030204" pitchFamily="18" charset="0"/>
                             <a:ea typeface="Cambria Math" panose="02040503050406030204" pitchFamily="18" charset="0"/>
                           </a:rPr>
                           <m:t>𝑠𝑡</m:t>
@@ -8934,7 +8777,13 @@
                 </a14:m>
                 <a:r>
                   <a:rPr lang="en-US" sz="2000" dirty="0"/>
-                  <a:t>: number of shortest paths between nodes </a:t>
+                  <a:t>: number of shortest paths </a:t>
+                </a:r>
+              </a:p>
+              <a:p>
+                <a:r>
+                  <a:rPr lang="en-US" sz="2000" dirty="0"/>
+                  <a:t>between nodes </a:t>
                 </a:r>
                 <a:r>
                   <a:rPr lang="en-US" sz="2000" i="1" dirty="0"/>
@@ -8959,6 +8808,7 @@
                       <m:sSubPr>
                         <m:ctrlPr>
                           <a:rPr lang="en-US" sz="2000" i="1">
+                            <a:latin typeface="Cambria Math" panose="02040503050406030204" pitchFamily="18" charset="0"/>
                             <a:ea typeface="Cambria Math" panose="02040503050406030204" pitchFamily="18" charset="0"/>
                           </a:rPr>
                         </m:ctrlPr>
@@ -8966,6 +8816,7 @@
                       <m:e>
                         <m:r>
                           <a:rPr lang="en-US" sz="2000" i="1">
+                            <a:latin typeface="Cambria Math" panose="02040503050406030204" pitchFamily="18" charset="0"/>
                             <a:ea typeface="Cambria Math" panose="02040503050406030204" pitchFamily="18" charset="0"/>
                           </a:rPr>
                           <m:t>𝜎</m:t>
@@ -8974,6 +8825,7 @@
                       <m:sub>
                         <m:r>
                           <a:rPr lang="en-US" sz="2000" i="1">
+                            <a:latin typeface="Cambria Math" panose="02040503050406030204" pitchFamily="18" charset="0"/>
                             <a:ea typeface="Cambria Math" panose="02040503050406030204" pitchFamily="18" charset="0"/>
                           </a:rPr>
                           <m:t>𝑠𝑡</m:t>
@@ -8982,18 +8834,21 @@
                     </m:sSub>
                     <m:r>
                       <a:rPr lang="en-US" sz="2000" i="1">
+                        <a:latin typeface="Cambria Math" panose="02040503050406030204" pitchFamily="18" charset="0"/>
                         <a:ea typeface="Cambria Math" panose="02040503050406030204" pitchFamily="18" charset="0"/>
                       </a:rPr>
                       <m:t>(</m:t>
                     </m:r>
                     <m:r>
                       <a:rPr lang="en-US" sz="2000" i="1">
+                        <a:latin typeface="Cambria Math" panose="02040503050406030204" pitchFamily="18" charset="0"/>
                         <a:ea typeface="Cambria Math" panose="02040503050406030204" pitchFamily="18" charset="0"/>
                       </a:rPr>
                       <m:t>𝑒</m:t>
                     </m:r>
                     <m:r>
                       <a:rPr lang="en-US" sz="2000" i="1">
+                        <a:latin typeface="Cambria Math" panose="02040503050406030204" pitchFamily="18" charset="0"/>
                         <a:ea typeface="Cambria Math" panose="02040503050406030204" pitchFamily="18" charset="0"/>
                       </a:rPr>
                       <m:t>)</m:t>
@@ -9002,7 +8857,13 @@
                 </a14:m>
                 <a:r>
                   <a:rPr lang="en-US" sz="2000" dirty="0"/>
-                  <a:t>: number of those paths that include edge </a:t>
+                  <a:t>: number of those paths </a:t>
+                </a:r>
+              </a:p>
+              <a:p>
+                <a:r>
+                  <a:rPr lang="en-US" sz="2000" dirty="0"/>
+                  <a:t>that include edge </a:t>
                 </a:r>
                 <a:r>
                   <a:rPr lang="en-US" sz="2000" i="1" dirty="0"/>
@@ -9012,7 +8873,7 @@
             </p:txBody>
           </p:sp>
         </mc:Choice>
-        <mc:Fallback>
+        <mc:Fallback xmlns="">
           <p:sp>
             <p:nvSpPr>
               <p:cNvPr id="184" name="TextBox 183">
@@ -9029,8 +8890,8 @@
             </p:nvSpPr>
             <p:spPr>
               <a:xfrm>
-                <a:off x="22581177" y="19812000"/>
-                <a:ext cx="5723527" cy="707886"/>
+                <a:off x="23270573" y="19828014"/>
+                <a:ext cx="4771027" cy="1323439"/>
               </a:xfrm>
               <a:prstGeom prst="rect">
                 <a:avLst/>
@@ -9038,7 +8899,7 @@
               <a:blipFill>
                 <a:blip r:embed="rId7"/>
                 <a:stretch>
-                  <a:fillRect t="-3448" b="-12069"/>
+                  <a:fillRect l="-1058" t="-1869" b="-6542"/>
                 </a:stretch>
               </a:blipFill>
               <a:ln>
@@ -10173,8 +10034,8 @@
           </a:p>
         </p:txBody>
       </p:sp>
-      <mc:AlternateContent xmlns:mc="http://schemas.openxmlformats.org/markup-compatibility/2006">
-        <mc:Choice xmlns:a14="http://schemas.microsoft.com/office/drawing/2010/main" Requires="a14">
+      <mc:AlternateContent xmlns:mc="http://schemas.openxmlformats.org/markup-compatibility/2006" xmlns:a14="http://schemas.microsoft.com/office/drawing/2010/main">
+        <mc:Choice Requires="a14">
           <p:sp>
             <p:nvSpPr>
               <p:cNvPr id="254" name="TextBox 253">
@@ -10189,7 +10050,7 @@
             </p:nvSpPr>
             <p:spPr>
               <a:xfrm>
-                <a:off x="23779014" y="25886562"/>
+                <a:off x="23779014" y="26697973"/>
                 <a:ext cx="3427462" cy="1145635"/>
               </a:xfrm>
               <a:prstGeom prst="rect">
@@ -10203,6 +10064,7 @@
               </a:bodyPr>
               <a:lstStyle/>
               <a:p>
+                <a:pPr/>
                 <a14:m>
                   <m:oMathPara xmlns:m="http://schemas.openxmlformats.org/officeDocument/2006/math">
                     <m:oMathParaPr>
@@ -10340,7 +10202,7 @@
             </p:txBody>
           </p:sp>
         </mc:Choice>
-        <mc:Fallback>
+        <mc:Fallback xmlns="">
           <p:sp>
             <p:nvSpPr>
               <p:cNvPr id="254" name="TextBox 253">
@@ -10357,7 +10219,7 @@
             </p:nvSpPr>
             <p:spPr>
               <a:xfrm>
-                <a:off x="23779014" y="25886562"/>
+                <a:off x="23779014" y="26697973"/>
                 <a:ext cx="3427462" cy="1145635"/>
               </a:xfrm>
               <a:prstGeom prst="rect">
@@ -10366,7 +10228,7 @@
               <a:blipFill>
                 <a:blip r:embed="rId9"/>
                 <a:stretch>
-                  <a:fillRect l="-2214" t="-126374" b="-183516"/>
+                  <a:fillRect l="-2214" t="-125275" b="-183516"/>
                 </a:stretch>
               </a:blipFill>
             </p:spPr>
@@ -10399,7 +10261,7 @@
         </p:nvSpPr>
         <p:spPr>
           <a:xfrm>
-            <a:off x="23966283" y="26913026"/>
+            <a:off x="23966283" y="27724437"/>
             <a:ext cx="3260060" cy="923330"/>
           </a:xfrm>
           <a:prstGeom prst="rect">
@@ -10468,7 +10330,7 @@
         </p:nvSpPr>
         <p:spPr>
           <a:xfrm>
-            <a:off x="16495444" y="12625820"/>
+            <a:off x="16495444" y="12397221"/>
             <a:ext cx="2744341" cy="646331"/>
           </a:xfrm>
           <a:prstGeom prst="rect">
@@ -10773,7 +10635,7 @@
               <a:tabLst/>
             </a:pPr>
             <a:br>
-              <a:rPr kumimoji="0" lang="en-US" altLang="en-US" sz="900" b="0" i="0" u="none" strike="noStrike" cap="none" normalizeH="0" baseline="0">
+              <a:rPr kumimoji="0" lang="en-US" altLang="en-US" sz="900" b="0" i="0" u="none" strike="noStrike" cap="none" normalizeH="0" baseline="0" dirty="0">
                 <a:ln>
                   <a:noFill/>
                 </a:ln>
@@ -10785,7 +10647,7 @@
               </a:rPr>
             </a:br>
             <a:r>
-              <a:rPr kumimoji="0" lang="en-US" altLang="en-US" sz="900" b="0" i="0" u="none" strike="noStrike" cap="none" normalizeH="0" baseline="0">
+              <a:rPr kumimoji="0" lang="en-US" altLang="en-US" sz="900" b="0" i="0" u="none" strike="noStrike" cap="none" normalizeH="0" baseline="0" dirty="0">
                 <a:ln>
                   <a:noFill/>
                 </a:ln>
@@ -10795,9 +10657,204 @@
                 <a:effectLst/>
                 <a:latin typeface="var(--jp-code-font-family)"/>
               </a:rPr>
-              <a:t>Saved: edges_with_neff_knee_pelt_labels.csv knee_backbone_edges_only.csv pelt_backbone_edges_only.csv Saved figures: threshold_comparison_rank_plot.png threshold_comparison_logB_plot.png knee_detection_diagnostic.png threshold_cumulative_importance.png knee_backbone_force_vs_B.png</a:t>
-            </a:r>
-            <a:endParaRPr kumimoji="0" lang="en-US" altLang="en-US" sz="1800" b="0" i="0" u="none" strike="noStrike" cap="none" normalizeH="0" baseline="0">
+              <a:t>Saved: </a:t>
+            </a:r>
+            <a:r>
+              <a:rPr kumimoji="0" lang="en-US" altLang="en-US" sz="900" b="0" i="0" u="none" strike="noStrike" cap="none" normalizeH="0" baseline="0" dirty="0" err="1">
+                <a:ln>
+                  <a:noFill/>
+                </a:ln>
+                <a:solidFill>
+                  <a:schemeClr val="tx1"/>
+                </a:solidFill>
+                <a:effectLst/>
+                <a:latin typeface="var(--jp-code-font-family)"/>
+              </a:rPr>
+              <a:t>edges_with_neff_knee_pelt_labels.csv</a:t>
+            </a:r>
+            <a:r>
+              <a:rPr kumimoji="0" lang="en-US" altLang="en-US" sz="900" b="0" i="0" u="none" strike="noStrike" cap="none" normalizeH="0" baseline="0" dirty="0">
+                <a:ln>
+                  <a:noFill/>
+                </a:ln>
+                <a:solidFill>
+                  <a:schemeClr val="tx1"/>
+                </a:solidFill>
+                <a:effectLst/>
+                <a:latin typeface="var(--jp-code-font-family)"/>
+              </a:rPr>
+              <a:t> </a:t>
+            </a:r>
+            <a:r>
+              <a:rPr kumimoji="0" lang="en-US" altLang="en-US" sz="900" b="0" i="0" u="none" strike="noStrike" cap="none" normalizeH="0" baseline="0" dirty="0" err="1">
+                <a:ln>
+                  <a:noFill/>
+                </a:ln>
+                <a:solidFill>
+                  <a:schemeClr val="tx1"/>
+                </a:solidFill>
+                <a:effectLst/>
+                <a:latin typeface="var(--jp-code-font-family)"/>
+              </a:rPr>
+              <a:t>knee_backbone_edges_only.csv</a:t>
+            </a:r>
+            <a:r>
+              <a:rPr kumimoji="0" lang="en-US" altLang="en-US" sz="900" b="0" i="0" u="none" strike="noStrike" cap="none" normalizeH="0" baseline="0" dirty="0">
+                <a:ln>
+                  <a:noFill/>
+                </a:ln>
+                <a:solidFill>
+                  <a:schemeClr val="tx1"/>
+                </a:solidFill>
+                <a:effectLst/>
+                <a:latin typeface="var(--jp-code-font-family)"/>
+              </a:rPr>
+              <a:t> </a:t>
+            </a:r>
+            <a:r>
+              <a:rPr kumimoji="0" lang="en-US" altLang="en-US" sz="900" b="0" i="0" u="none" strike="noStrike" cap="none" normalizeH="0" baseline="0" dirty="0" err="1">
+                <a:ln>
+                  <a:noFill/>
+                </a:ln>
+                <a:solidFill>
+                  <a:schemeClr val="tx1"/>
+                </a:solidFill>
+                <a:effectLst/>
+                <a:latin typeface="var(--jp-code-font-family)"/>
+              </a:rPr>
+              <a:t>pelt_backbone_edges_only.csv</a:t>
+            </a:r>
+            <a:r>
+              <a:rPr kumimoji="0" lang="en-US" altLang="en-US" sz="900" b="0" i="0" u="none" strike="noStrike" cap="none" normalizeH="0" baseline="0" dirty="0">
+                <a:ln>
+                  <a:noFill/>
+                </a:ln>
+                <a:solidFill>
+                  <a:schemeClr val="tx1"/>
+                </a:solidFill>
+                <a:effectLst/>
+                <a:latin typeface="var(--jp-code-font-family)"/>
+              </a:rPr>
+              <a:t> Saved figures: </a:t>
+            </a:r>
+            <a:r>
+              <a:rPr kumimoji="0" lang="en-US" altLang="en-US" sz="900" b="0" i="0" u="none" strike="noStrike" cap="none" normalizeH="0" baseline="0" dirty="0" err="1">
+                <a:ln>
+                  <a:noFill/>
+                </a:ln>
+                <a:solidFill>
+                  <a:schemeClr val="tx1"/>
+                </a:solidFill>
+                <a:effectLst/>
+                <a:latin typeface="var(--jp-code-font-family)"/>
+              </a:rPr>
+              <a:t>threshold_comparison_rank_plot.png</a:t>
+            </a:r>
+            <a:r>
+              <a:rPr kumimoji="0" lang="en-US" altLang="en-US" sz="900" b="0" i="0" u="none" strike="noStrike" cap="none" normalizeH="0" baseline="0" dirty="0">
+                <a:ln>
+                  <a:noFill/>
+                </a:ln>
+                <a:solidFill>
+                  <a:schemeClr val="tx1"/>
+                </a:solidFill>
+                <a:effectLst/>
+                <a:latin typeface="var(--jp-code-font-family)"/>
+              </a:rPr>
+              <a:t> </a:t>
+            </a:r>
+            <a:r>
+              <a:rPr kumimoji="0" lang="en-US" altLang="en-US" sz="900" b="0" i="0" u="none" strike="noStrike" cap="none" normalizeH="0" baseline="0" dirty="0" err="1">
+                <a:ln>
+                  <a:noFill/>
+                </a:ln>
+                <a:solidFill>
+                  <a:schemeClr val="tx1"/>
+                </a:solidFill>
+                <a:effectLst/>
+                <a:latin typeface="var(--jp-code-font-family)"/>
+              </a:rPr>
+              <a:t>threshold_comparison_logB_plot.png</a:t>
+            </a:r>
+            <a:r>
+              <a:rPr kumimoji="0" lang="en-US" altLang="en-US" sz="900" b="0" i="0" u="none" strike="noStrike" cap="none" normalizeH="0" baseline="0" dirty="0">
+                <a:ln>
+                  <a:noFill/>
+                </a:ln>
+                <a:solidFill>
+                  <a:schemeClr val="tx1"/>
+                </a:solidFill>
+                <a:effectLst/>
+                <a:latin typeface="var(--jp-code-font-family)"/>
+              </a:rPr>
+              <a:t> </a:t>
+            </a:r>
+            <a:r>
+              <a:rPr kumimoji="0" lang="en-US" altLang="en-US" sz="900" b="0" i="0" u="none" strike="noStrike" cap="none" normalizeH="0" baseline="0" dirty="0" err="1">
+                <a:ln>
+                  <a:noFill/>
+                </a:ln>
+                <a:solidFill>
+                  <a:schemeClr val="tx1"/>
+                </a:solidFill>
+                <a:effectLst/>
+                <a:latin typeface="var(--jp-code-font-family)"/>
+              </a:rPr>
+              <a:t>knee_detection_diagnostic.png</a:t>
+            </a:r>
+            <a:r>
+              <a:rPr kumimoji="0" lang="en-US" altLang="en-US" sz="900" b="0" i="0" u="none" strike="noStrike" cap="none" normalizeH="0" baseline="0" dirty="0">
+                <a:ln>
+                  <a:noFill/>
+                </a:ln>
+                <a:solidFill>
+                  <a:schemeClr val="tx1"/>
+                </a:solidFill>
+                <a:effectLst/>
+                <a:latin typeface="var(--jp-code-font-family)"/>
+              </a:rPr>
+              <a:t> </a:t>
+            </a:r>
+            <a:r>
+              <a:rPr kumimoji="0" lang="en-US" altLang="en-US" sz="900" b="0" i="0" u="none" strike="noStrike" cap="none" normalizeH="0" baseline="0" dirty="0" err="1">
+                <a:ln>
+                  <a:noFill/>
+                </a:ln>
+                <a:solidFill>
+                  <a:schemeClr val="tx1"/>
+                </a:solidFill>
+                <a:effectLst/>
+                <a:latin typeface="var(--jp-code-font-family)"/>
+              </a:rPr>
+              <a:t>threshold_cumulative_importance.png</a:t>
+            </a:r>
+            <a:r>
+              <a:rPr kumimoji="0" lang="en-US" altLang="en-US" sz="900" b="0" i="0" u="none" strike="noStrike" cap="none" normalizeH="0" baseline="0" dirty="0">
+                <a:ln>
+                  <a:noFill/>
+                </a:ln>
+                <a:solidFill>
+                  <a:schemeClr val="tx1"/>
+                </a:solidFill>
+                <a:effectLst/>
+                <a:latin typeface="var(--jp-code-font-family)"/>
+              </a:rPr>
+              <a:t> </a:t>
+            </a:r>
+            <a:r>
+              <a:rPr kumimoji="0" lang="en-US" altLang="en-US" sz="900" b="0" i="0" u="none" strike="noStrike" cap="none" normalizeH="0" baseline="0" dirty="0" err="1">
+                <a:ln>
+                  <a:noFill/>
+                </a:ln>
+                <a:solidFill>
+                  <a:schemeClr val="tx1"/>
+                </a:solidFill>
+                <a:effectLst/>
+                <a:latin typeface="var(--jp-code-font-family)"/>
+              </a:rPr>
+              <a:t>knee_backbone_force_vs_B.png</a:t>
+            </a:r>
+            <a:endParaRPr kumimoji="0" lang="en-US" altLang="en-US" sz="1800" b="0" i="0" u="none" strike="noStrike" cap="none" normalizeH="0" baseline="0" dirty="0">
               <a:ln>
                 <a:noFill/>
               </a:ln>
@@ -10846,8 +10903,8 @@
           </a:p>
         </p:txBody>
       </p:sp>
-      <mc:AlternateContent xmlns:mc="http://schemas.openxmlformats.org/markup-compatibility/2006">
-        <mc:Choice xmlns:a14="http://schemas.microsoft.com/office/drawing/2010/main" Requires="a14">
+      <mc:AlternateContent xmlns:mc="http://schemas.openxmlformats.org/markup-compatibility/2006" xmlns:a14="http://schemas.microsoft.com/office/drawing/2010/main">
+        <mc:Choice Requires="a14">
           <p:sp>
             <p:nvSpPr>
               <p:cNvPr id="293" name="TextBox 292">
@@ -10862,7 +10919,7 @@
             </p:nvSpPr>
             <p:spPr>
               <a:xfrm>
-                <a:off x="22784391" y="31851600"/>
+                <a:off x="22784391" y="32613599"/>
                 <a:ext cx="4781937" cy="1058623"/>
               </a:xfrm>
               <a:prstGeom prst="rect">
@@ -10876,6 +10933,7 @@
               </a:bodyPr>
               <a:lstStyle/>
               <a:p>
+                <a:pPr/>
                 <a14:m>
                   <m:oMathPara xmlns:m="http://schemas.openxmlformats.org/officeDocument/2006/math">
                     <m:oMathParaPr>
@@ -11122,7 +11180,7 @@
             </p:txBody>
           </p:sp>
         </mc:Choice>
-        <mc:Fallback>
+        <mc:Fallback xmlns="">
           <p:sp>
             <p:nvSpPr>
               <p:cNvPr id="293" name="TextBox 292">
@@ -11139,7 +11197,7 @@
             </p:nvSpPr>
             <p:spPr>
               <a:xfrm>
-                <a:off x="22784391" y="31851600"/>
+                <a:off x="22784391" y="32613599"/>
                 <a:ext cx="4781937" cy="1058623"/>
               </a:xfrm>
               <a:prstGeom prst="rect">
@@ -11183,8 +11241,8 @@
         </p:nvSpPr>
         <p:spPr bwMode="auto">
           <a:xfrm>
-            <a:off x="22142448" y="34449516"/>
-            <a:ext cx="6293974" cy="3955284"/>
+            <a:off x="22142448" y="35225920"/>
+            <a:ext cx="6293974" cy="3178880"/>
           </a:xfrm>
           <a:prstGeom prst="rect">
             <a:avLst/>
@@ -11309,7 +11367,7 @@
               <a:rPr lang="en-US" sz="3600" b="1" dirty="0">
                 <a:latin typeface="Calibri" pitchFamily="34" charset="0"/>
               </a:rPr>
-              <a:t>Betweenness method</a:t>
+              <a:t>This work</a:t>
             </a:r>
           </a:p>
           <a:p>
@@ -11321,7 +11379,7 @@
               <a:rPr lang="en-US" sz="3600" dirty="0">
                 <a:latin typeface="Calibri" pitchFamily="34" charset="0"/>
               </a:rPr>
-              <a:t>Threshold: High EBC transport edges.</a:t>
+              <a:t>Global transport importance (EBC)</a:t>
             </a:r>
           </a:p>
           <a:p>
@@ -11333,7 +11391,7 @@
               <a:rPr lang="en-US" sz="3600" dirty="0">
                 <a:latin typeface="Calibri" pitchFamily="34" charset="0"/>
               </a:rPr>
-              <a:t>Geometric direction: chain bend alignment (&lt;45°)</a:t>
+              <a:t>Change-point thresholding</a:t>
             </a:r>
           </a:p>
           <a:p>
@@ -11345,7 +11403,7 @@
               <a:rPr lang="en-US" sz="3600" dirty="0">
                 <a:latin typeface="Calibri" pitchFamily="34" charset="0"/>
               </a:rPr>
-              <a:t>Global network transport criterion.</a:t>
+              <a:t>Geometric chain extraction</a:t>
             </a:r>
           </a:p>
         </p:txBody>
@@ -11429,7 +11487,7 @@
         </p:blipFill>
         <p:spPr bwMode="auto">
           <a:xfrm>
-            <a:off x="22983914" y="22629918"/>
+            <a:off x="22983914" y="23441329"/>
             <a:ext cx="4816308" cy="2987330"/>
           </a:xfrm>
           <a:prstGeom prst="rect">
@@ -11475,7 +11533,7 @@
         </p:blipFill>
         <p:spPr>
           <a:xfrm>
-            <a:off x="28556597" y="17983200"/>
+            <a:off x="28552923" y="18070303"/>
             <a:ext cx="7772400" cy="3787188"/>
           </a:xfrm>
           <a:prstGeom prst="rect">
@@ -11511,7 +11569,7 @@
         </p:blipFill>
         <p:spPr>
           <a:xfrm>
-            <a:off x="29717279" y="21759780"/>
+            <a:off x="29717279" y="21832031"/>
             <a:ext cx="5156326" cy="2926081"/>
           </a:xfrm>
           <a:prstGeom prst="rect">
@@ -11547,7 +11605,7 @@
         </p:blipFill>
         <p:spPr>
           <a:xfrm>
-            <a:off x="35203679" y="21833689"/>
+            <a:off x="35203679" y="21905940"/>
             <a:ext cx="5156326" cy="3365072"/>
           </a:xfrm>
           <a:prstGeom prst="rect">
@@ -11583,7 +11641,7 @@
         </p:blipFill>
         <p:spPr>
           <a:xfrm>
-            <a:off x="35152942" y="18462194"/>
+            <a:off x="35149268" y="18514264"/>
             <a:ext cx="6438900" cy="3289300"/>
           </a:xfrm>
           <a:prstGeom prst="rect">
@@ -11619,7 +11677,7 @@
         </p:blipFill>
         <p:spPr>
           <a:xfrm>
-            <a:off x="41348251" y="20090147"/>
+            <a:off x="41348251" y="20357578"/>
             <a:ext cx="1460500" cy="3543300"/>
           </a:xfrm>
           <a:prstGeom prst="rect">
@@ -11964,7 +12022,7 @@
         </p:blipFill>
         <p:spPr>
           <a:xfrm>
-            <a:off x="2845095" y="29718000"/>
+            <a:off x="2917428" y="29366401"/>
             <a:ext cx="9880305" cy="7313362"/>
           </a:xfrm>
           <a:prstGeom prst="rect">
@@ -12235,7 +12293,7 @@
         </p:nvSpPr>
         <p:spPr>
           <a:xfrm>
-            <a:off x="29420421" y="27101287"/>
+            <a:off x="29420421" y="27368718"/>
             <a:ext cx="12706798" cy="1815882"/>
           </a:xfrm>
           <a:prstGeom prst="rect">
@@ -12277,7 +12335,7 @@
         </p:nvSpPr>
         <p:spPr>
           <a:xfrm>
-            <a:off x="31551380" y="24993600"/>
+            <a:off x="31551380" y="25261031"/>
             <a:ext cx="2570512" cy="369332"/>
           </a:xfrm>
           <a:prstGeom prst="rect">
@@ -12344,7 +12402,7 @@
         </p:nvSpPr>
         <p:spPr>
           <a:xfrm>
-            <a:off x="36921383" y="24993600"/>
+            <a:off x="36921383" y="25261031"/>
             <a:ext cx="2570512" cy="369332"/>
           </a:xfrm>
           <a:prstGeom prst="rect">
@@ -12425,7 +12483,7 @@
         </p:blipFill>
         <p:spPr>
           <a:xfrm>
-            <a:off x="32447559" y="25683568"/>
+            <a:off x="32447559" y="25950999"/>
             <a:ext cx="914400" cy="914400"/>
           </a:xfrm>
           <a:prstGeom prst="rect">
@@ -12461,7 +12519,7 @@
         </p:blipFill>
         <p:spPr>
           <a:xfrm>
-            <a:off x="37915192" y="25683568"/>
+            <a:off x="37915192" y="25950999"/>
             <a:ext cx="914400" cy="914400"/>
           </a:xfrm>
           <a:prstGeom prst="rect">
@@ -12469,12 +12527,90 @@
           </a:prstGeom>
         </p:spPr>
       </p:pic>
+      <p:sp>
+        <p:nvSpPr>
+          <p:cNvPr id="1124" name="TextBox 1123">
+            <a:extLst>
+              <a:ext uri="{FF2B5EF4-FFF2-40B4-BE49-F238E27FC236}">
+                <a16:creationId xmlns:a16="http://schemas.microsoft.com/office/drawing/2014/main" id="{A9159D96-8DC7-F833-7F38-A0280742CF1D}"/>
+              </a:ext>
+            </a:extLst>
+          </p:cNvPr>
+          <p:cNvSpPr txBox="1"/>
+          <p:nvPr/>
+        </p:nvSpPr>
+        <p:spPr>
+          <a:xfrm>
+            <a:off x="31576780" y="26916411"/>
+            <a:ext cx="2298258" cy="369332"/>
+          </a:xfrm>
+          <a:prstGeom prst="rect">
+            <a:avLst/>
+          </a:prstGeom>
+          <a:solidFill>
+            <a:schemeClr val="bg1">
+              <a:lumMod val="95000"/>
+            </a:schemeClr>
+          </a:solidFill>
+        </p:spPr>
+        <p:txBody>
+          <a:bodyPr wrap="none" rtlCol="0">
+            <a:spAutoFit/>
+          </a:bodyPr>
+          <a:lstStyle/>
+          <a:p>
+            <a:r>
+              <a:rPr lang="en-US" sz="1800" dirty="0"/>
+              <a:t>Scan for interactive 3D</a:t>
+            </a:r>
+          </a:p>
+        </p:txBody>
+      </p:sp>
+      <p:sp>
+        <p:nvSpPr>
+          <p:cNvPr id="1125" name="TextBox 1124">
+            <a:extLst>
+              <a:ext uri="{FF2B5EF4-FFF2-40B4-BE49-F238E27FC236}">
+                <a16:creationId xmlns:a16="http://schemas.microsoft.com/office/drawing/2014/main" id="{2BD17ED6-349D-FE09-19AC-0334BA193CE6}"/>
+              </a:ext>
+            </a:extLst>
+          </p:cNvPr>
+          <p:cNvSpPr txBox="1"/>
+          <p:nvPr/>
+        </p:nvSpPr>
+        <p:spPr>
+          <a:xfrm>
+            <a:off x="37219589" y="26955231"/>
+            <a:ext cx="2298258" cy="369332"/>
+          </a:xfrm>
+          <a:prstGeom prst="rect">
+            <a:avLst/>
+          </a:prstGeom>
+          <a:solidFill>
+            <a:schemeClr val="bg1">
+              <a:lumMod val="95000"/>
+            </a:schemeClr>
+          </a:solidFill>
+        </p:spPr>
+        <p:txBody>
+          <a:bodyPr wrap="none" rtlCol="0">
+            <a:spAutoFit/>
+          </a:bodyPr>
+          <a:lstStyle/>
+          <a:p>
+            <a:r>
+              <a:rPr lang="en-US" sz="1800" dirty="0"/>
+              <a:t>Scan for interactive 3D</a:t>
+            </a:r>
+          </a:p>
+        </p:txBody>
+      </p:sp>
       <p:graphicFrame>
         <p:nvGraphicFramePr>
-          <p:cNvPr id="1114" name="Table 1113">
+          <p:cNvPr id="22" name="Table 21">
             <a:extLst>
               <a:ext uri="{FF2B5EF4-FFF2-40B4-BE49-F238E27FC236}">
-                <a16:creationId xmlns:a16="http://schemas.microsoft.com/office/drawing/2014/main" id="{A0D6760B-C220-810A-410D-1092DC282059}"/>
+                <a16:creationId xmlns:a16="http://schemas.microsoft.com/office/drawing/2014/main" id="{F5E70D30-4216-FC92-D90A-75B652686BEA}"/>
               </a:ext>
             </a:extLst>
           </p:cNvPr>
@@ -12484,14 +12620,14 @@
           <p:nvPr>
             <p:extLst>
               <p:ext uri="{D42A27DB-BD31-4B8C-83A1-F6EECF244321}">
-                <p14:modId xmlns:p14="http://schemas.microsoft.com/office/powerpoint/2010/main" val="2652063551"/>
+                <p14:modId xmlns:p14="http://schemas.microsoft.com/office/powerpoint/2010/main" val="4160156173"/>
               </p:ext>
             </p:extLst>
           </p:nvPr>
         </p:nvGraphicFramePr>
         <p:xfrm>
-          <a:off x="29260799" y="11201400"/>
-          <a:ext cx="12801601" cy="6509811"/>
+          <a:off x="29884636" y="12192000"/>
+          <a:ext cx="11415764" cy="6054833"/>
         </p:xfrm>
         <a:graphic>
           <a:graphicData uri="http://schemas.openxmlformats.org/drawingml/2006/table">
@@ -12500,43 +12636,36 @@
                 <a:tableStyleId>{5C22544A-7EE6-4342-B048-85BDC9FD1C3A}</a:tableStyleId>
               </a:tblPr>
               <a:tblGrid>
-                <a:gridCol w="3879314">
+                <a:gridCol w="3841564">
                   <a:extLst>
                     <a:ext uri="{9D8B030D-6E8A-4147-A177-3AD203B41FA5}">
                       <a16:colId xmlns:a16="http://schemas.microsoft.com/office/drawing/2014/main" val="169723824"/>
                     </a:ext>
                   </a:extLst>
                 </a:gridCol>
-                <a:gridCol w="2413536">
+                <a:gridCol w="2431276">
                   <a:extLst>
                     <a:ext uri="{9D8B030D-6E8A-4147-A177-3AD203B41FA5}">
                       <a16:colId xmlns:a16="http://schemas.microsoft.com/office/drawing/2014/main" val="4226328269"/>
                     </a:ext>
                   </a:extLst>
                 </a:gridCol>
-                <a:gridCol w="2667000">
+                <a:gridCol w="2686602">
                   <a:extLst>
                     <a:ext uri="{9D8B030D-6E8A-4147-A177-3AD203B41FA5}">
                       <a16:colId xmlns:a16="http://schemas.microsoft.com/office/drawing/2014/main" val="4200796953"/>
                     </a:ext>
                   </a:extLst>
                 </a:gridCol>
-                <a:gridCol w="2438400">
+                <a:gridCol w="2456322">
                   <a:extLst>
                     <a:ext uri="{9D8B030D-6E8A-4147-A177-3AD203B41FA5}">
                       <a16:colId xmlns:a16="http://schemas.microsoft.com/office/drawing/2014/main" val="471674143"/>
                     </a:ext>
                   </a:extLst>
                 </a:gridCol>
-                <a:gridCol w="1403351">
-                  <a:extLst>
-                    <a:ext uri="{9D8B030D-6E8A-4147-A177-3AD203B41FA5}">
-                      <a16:colId xmlns:a16="http://schemas.microsoft.com/office/drawing/2014/main" val="3992729973"/>
-                    </a:ext>
-                  </a:extLst>
-                </a:gridCol>
               </a:tblGrid>
-              <a:tr h="929973">
+              <a:tr h="863000">
                 <a:tc>
                   <a:txBody>
                     <a:bodyPr/>
@@ -12560,7 +12689,7 @@
                         <a:defRPr/>
                       </a:pPr>
                       <a:r>
-                        <a:rPr kumimoji="0" lang="en-US" sz="2400" b="1" i="0" u="none" strike="noStrike" kern="1200" cap="none" spc="0" normalizeH="0" baseline="0" noProof="0" dirty="0">
+                        <a:rPr kumimoji="0" lang="en-US" sz="2800" b="1" i="0" u="none" strike="noStrike" kern="1200" cap="none" spc="0" normalizeH="0" baseline="0" noProof="0" dirty="0">
                           <a:ln>
                             <a:noFill/>
                           </a:ln>
@@ -12577,22 +12706,8 @@
                           <a:ea typeface="+mn-ea"/>
                           <a:cs typeface="+mn-cs"/>
                         </a:rPr>
-                        <a:t>Low Friction</a:t>
+                        <a:t>Metric </a:t>
                       </a:r>
-                      <a:endParaRPr kumimoji="0" lang="en-US" sz="2400" b="1" i="0" u="none" strike="noStrike" kern="1200" cap="none" spc="0" normalizeH="0" baseline="0" noProof="0" dirty="0">
-                        <a:ln>
-                          <a:noFill/>
-                        </a:ln>
-                        <a:solidFill>
-                          <a:srgbClr val="FFFFFF"/>
-                        </a:solidFill>
-                        <a:effectLst/>
-                        <a:uLnTx/>
-                        <a:uFillTx/>
-                        <a:latin typeface="+mn-lt"/>
-                        <a:ea typeface="+mn-ea"/>
-                        <a:cs typeface="+mn-cs"/>
-                      </a:endParaRPr>
                     </a:p>
                   </a:txBody>
                   <a:tcPr anchor="ctr">
@@ -12610,7 +12725,7 @@
                     <a:p>
                       <a:pPr algn="ctr"/>
                       <a:r>
-                        <a:rPr kumimoji="0" lang="en-US" sz="2400" b="1" u="none" strike="noStrike" kern="1200" cap="none" spc="0" normalizeH="0" baseline="0" noProof="0" dirty="0">
+                        <a:rPr kumimoji="0" lang="en-US" sz="2800" b="1" u="none" strike="noStrike" kern="1200" cap="none" spc="0" normalizeH="0" baseline="0" noProof="0" dirty="0">
                           <a:ln>
                             <a:noFill/>
                           </a:ln>
@@ -12626,7 +12741,7 @@
                         </a:rPr>
                         <a:t>Low Friction</a:t>
                       </a:r>
-                      <a:endParaRPr lang="en-US" sz="2400" dirty="0">
+                      <a:endParaRPr lang="en-US" sz="2800" dirty="0">
                         <a:latin typeface="+mn-lt"/>
                       </a:endParaRPr>
                     </a:p>
@@ -12646,7 +12761,7 @@
                     <a:p>
                       <a:pPr algn="ctr"/>
                       <a:r>
-                        <a:rPr lang="en-US" sz="2400" b="1" dirty="0">
+                        <a:rPr lang="en-US" sz="2800" b="1" dirty="0">
                           <a:solidFill>
                             <a:schemeClr val="accent3">
                               <a:lumMod val="20000"/>
@@ -12656,7 +12771,7 @@
                         </a:rPr>
                         <a:t>High Friction</a:t>
                       </a:r>
-                      <a:endParaRPr lang="en-US" sz="2400" dirty="0">
+                      <a:endParaRPr lang="en-US" sz="2800" dirty="0">
                         <a:latin typeface="+mn-lt"/>
                       </a:endParaRPr>
                     </a:p>
@@ -12676,7 +12791,7 @@
                     <a:p>
                       <a:pPr algn="ctr"/>
                       <a:r>
-                        <a:rPr lang="en-US" sz="2400" b="1" dirty="0">
+                        <a:rPr lang="en-US" sz="2800" b="1" dirty="0">
                           <a:solidFill>
                             <a:schemeClr val="accent3">
                               <a:lumMod val="20000"/>
@@ -12685,28 +12800,9 @@
                           </a:solidFill>
                           <a:latin typeface="+mn-lt"/>
                         </a:rPr>
-                        <a:t>%Change</a:t>
+                        <a:t>Change</a:t>
                       </a:r>
-                      <a:endParaRPr lang="en-US" sz="2400" dirty="0">
-                        <a:latin typeface="+mn-lt"/>
-                      </a:endParaRPr>
-                    </a:p>
-                  </a:txBody>
-                  <a:tcPr anchor="ctr">
-                    <a:solidFill>
-                      <a:schemeClr val="accent1">
-                        <a:lumMod val="75000"/>
-                      </a:schemeClr>
-                    </a:solidFill>
-                  </a:tcPr>
-                </a:tc>
-                <a:tc>
-                  <a:txBody>
-                    <a:bodyPr/>
-                    <a:lstStyle/>
-                    <a:p>
-                      <a:pPr algn="ctr"/>
-                      <a:endParaRPr lang="en-US" sz="2400" dirty="0">
+                      <a:endParaRPr lang="en-US" sz="2800" dirty="0">
                         <a:latin typeface="+mn-lt"/>
                       </a:endParaRPr>
                     </a:p>
@@ -12725,29 +12821,17 @@
                   </a:ext>
                 </a:extLst>
               </a:tr>
-              <a:tr h="929973">
+              <a:tr h="863000">
                 <a:tc>
                   <a:txBody>
                     <a:bodyPr/>
                     <a:lstStyle/>
                     <a:p>
                       <a:r>
-                        <a:rPr lang="en-US" sz="2400" dirty="0"/>
-                        <a:t>Mean chain height </a:t>
+                        <a:rPr lang="en-US" sz="2800" dirty="0"/>
+                        <a:t>Chain count</a:t>
                       </a:r>
-                      <a:r>
-                        <a:rPr lang="en-US" sz="2400" i="0" dirty="0"/>
-                        <a:t>(</a:t>
-                      </a:r>
-                      <a:r>
-                        <a:rPr lang="en-US" sz="2400" i="1" dirty="0"/>
-                        <a:t>z</a:t>
-                      </a:r>
-                      <a:r>
-                        <a:rPr lang="en-US" sz="2400" i="0" dirty="0"/>
-                        <a:t>)</a:t>
-                      </a:r>
-                      <a:endParaRPr lang="en-US" sz="2400" i="0" dirty="0">
+                      <a:endParaRPr lang="en-US" sz="2800" dirty="0">
                         <a:latin typeface="+mn-lt"/>
                       </a:endParaRPr>
                     </a:p>
@@ -12761,7 +12845,92 @@
                     <a:p>
                       <a:pPr algn="ctr"/>
                       <a:r>
-                        <a:rPr lang="en-US" sz="2400" dirty="0">
+                        <a:rPr lang="en-US" sz="2800" dirty="0">
+                          <a:latin typeface="+mn-lt"/>
+                        </a:rPr>
+                        <a:t>154</a:t>
+                      </a:r>
+                    </a:p>
+                  </a:txBody>
+                  <a:tcPr anchor="ctr"/>
+                </a:tc>
+                <a:tc>
+                  <a:txBody>
+                    <a:bodyPr/>
+                    <a:lstStyle/>
+                    <a:p>
+                      <a:pPr algn="ctr"/>
+                      <a:r>
+                        <a:rPr lang="en-US" sz="2800" dirty="0">
+                          <a:latin typeface="+mn-lt"/>
+                        </a:rPr>
+                        <a:t>66</a:t>
+                      </a:r>
+                    </a:p>
+                  </a:txBody>
+                  <a:tcPr anchor="ctr"/>
+                </a:tc>
+                <a:tc>
+                  <a:txBody>
+                    <a:bodyPr/>
+                    <a:lstStyle/>
+                    <a:p>
+                      <a:pPr algn="ctr"/>
+                      <a:r>
+                        <a:rPr lang="en-US" sz="2800" dirty="0">
+                          <a:solidFill>
+                            <a:schemeClr val="tx1"/>
+                          </a:solidFill>
+                          <a:latin typeface="+mn-lt"/>
+                        </a:rPr>
+                        <a:t>↓57%</a:t>
+                      </a:r>
+                    </a:p>
+                  </a:txBody>
+                  <a:tcPr anchor="ctr"/>
+                </a:tc>
+                <a:extLst>
+                  <a:ext uri="{0D108BD9-81ED-4DB2-BD59-A6C34878D82A}">
+                    <a16:rowId xmlns:a16="http://schemas.microsoft.com/office/drawing/2014/main" val="1819102808"/>
+                  </a:ext>
+                </a:extLst>
+              </a:tr>
+              <a:tr h="876833">
+                <a:tc>
+                  <a:txBody>
+                    <a:bodyPr/>
+                    <a:lstStyle/>
+                    <a:p>
+                      <a:r>
+                        <a:rPr lang="en-US" sz="2800" dirty="0">
+                          <a:latin typeface="+mn-lt"/>
+                        </a:rPr>
+                        <a:t>Chain height (</a:t>
+                      </a:r>
+                      <a:r>
+                        <a:rPr lang="en-US" sz="2800" i="1" dirty="0">
+                          <a:latin typeface="+mn-lt"/>
+                        </a:rPr>
+                        <a:t>z</a:t>
+                      </a:r>
+                      <a:r>
+                        <a:rPr lang="en-US" sz="2800" dirty="0">
+                          <a:latin typeface="+mn-lt"/>
+                        </a:rPr>
+                        <a:t>)</a:t>
+                      </a:r>
+                    </a:p>
+                  </a:txBody>
+                  <a:tcPr anchor="ctr"/>
+                </a:tc>
+                <a:tc>
+                  <a:txBody>
+                    <a:bodyPr/>
+                    <a:lstStyle/>
+                    <a:p>
+                      <a:pPr algn="ctr"/>
+                      <a:r>
+                        <a:rPr lang="en-US" sz="2800" dirty="0">
                           <a:latin typeface="+mn-lt"/>
                         </a:rPr>
                         <a:t>1.62</a:t>
@@ -12777,158 +12946,10 @@
                     <a:p>
                       <a:pPr algn="ctr"/>
                       <a:r>
-                        <a:rPr lang="en-US" sz="2400" dirty="0">
+                        <a:rPr lang="en-US" sz="2800" dirty="0">
                           <a:latin typeface="+mn-lt"/>
                         </a:rPr>
                         <a:t>1.79</a:t>
-                      </a:r>
-                    </a:p>
-                  </a:txBody>
-                  <a:tcPr anchor="ctr"/>
-                </a:tc>
-                <a:tc>
-                  <a:txBody>
-                    <a:bodyPr/>
-                    <a:lstStyle/>
-                    <a:p>
-                      <a:pPr algn="ctr"/>
-                      <a:r>
-                        <a:rPr lang="en-US" sz="2400" dirty="0">
-                          <a:solidFill>
-                            <a:schemeClr val="tx1"/>
-                          </a:solidFill>
-                          <a:latin typeface="+mn-lt"/>
-                        </a:rPr>
-                        <a:t>10</a:t>
-                      </a:r>
-                    </a:p>
-                  </a:txBody>
-                  <a:tcPr anchor="ctr"/>
-                </a:tc>
-                <a:tc>
-                  <a:txBody>
-                    <a:bodyPr/>
-                    <a:lstStyle/>
-                    <a:p>
-                      <a:pPr algn="ctr"/>
-                      <a:r>
-                        <a:rPr lang="en-US" sz="2400" dirty="0">
-                          <a:solidFill>
-                            <a:srgbClr val="92D050"/>
-                          </a:solidFill>
-                          <a:latin typeface="+mn-lt"/>
-                        </a:rPr>
-                        <a:t>⬆️</a:t>
-                      </a:r>
-                    </a:p>
-                  </a:txBody>
-                  <a:tcPr anchor="ctr"/>
-                </a:tc>
-                <a:extLst>
-                  <a:ext uri="{0D108BD9-81ED-4DB2-BD59-A6C34878D82A}">
-                    <a16:rowId xmlns:a16="http://schemas.microsoft.com/office/drawing/2014/main" val="1110870346"/>
-                  </a:ext>
-                </a:extLst>
-              </a:tr>
-              <a:tr h="929973">
-                <a:tc>
-                  <a:txBody>
-                    <a:bodyPr/>
-                    <a:lstStyle/>
-                    <a:p>
-                      <a:r>
-                        <a:rPr lang="en-US" sz="2400" dirty="0">
-                          <a:solidFill>
-                            <a:prstClr val="black"/>
-                          </a:solidFill>
-                        </a:rPr>
-                        <a:t>Mean anchor radius (</a:t>
-                      </a:r>
-                      <a:r>
-                        <a:rPr lang="en-US" sz="2400" i="1" dirty="0" err="1">
-                          <a:solidFill>
-                            <a:prstClr val="black"/>
-                          </a:solidFill>
-                        </a:rPr>
-                        <a:t>r</a:t>
-                      </a:r>
-                      <a:r>
-                        <a:rPr lang="en-US" sz="2400" i="1" baseline="-25000" dirty="0" err="1">
-                          <a:solidFill>
-                            <a:prstClr val="black"/>
-                          </a:solidFill>
-                        </a:rPr>
-                        <a:t>anchor</a:t>
-                      </a:r>
-                      <a:r>
-                        <a:rPr lang="en-US" sz="2400" i="1" dirty="0">
-                          <a:solidFill>
-                            <a:prstClr val="black"/>
-                          </a:solidFill>
-                        </a:rPr>
-                        <a:t>/R</a:t>
-                      </a:r>
-                      <a:r>
-                        <a:rPr lang="en-US" sz="2400" dirty="0">
-                          <a:solidFill>
-                            <a:prstClr val="black"/>
-                          </a:solidFill>
-                        </a:rPr>
-                        <a:t>)</a:t>
-                      </a:r>
-                      <a:endParaRPr lang="en-US" sz="2400" dirty="0">
-                        <a:latin typeface="+mn-lt"/>
-                      </a:endParaRPr>
-                    </a:p>
-                  </a:txBody>
-                  <a:tcPr anchor="ctr"/>
-                </a:tc>
-                <a:tc>
-                  <a:txBody>
-                    <a:bodyPr/>
-                    <a:lstStyle/>
-                    <a:p>
-                      <a:pPr algn="ctr"/>
-                      <a:r>
-                        <a:rPr lang="en-US" sz="2400" dirty="0">
-                          <a:latin typeface="+mn-lt"/>
-                        </a:rPr>
-                        <a:t>0.55</a:t>
-                      </a:r>
-                    </a:p>
-                  </a:txBody>
-                  <a:tcPr anchor="ctr"/>
-                </a:tc>
-                <a:tc>
-                  <a:txBody>
-                    <a:bodyPr/>
-                    <a:lstStyle/>
-                    <a:p>
-                      <a:pPr algn="ctr"/>
-                      <a:r>
-                        <a:rPr lang="en-US" sz="2400" dirty="0">
-                          <a:latin typeface="+mn-lt"/>
-                        </a:rPr>
-                        <a:t>0.61</a:t>
-                      </a:r>
-                    </a:p>
-                  </a:txBody>
-                  <a:tcPr anchor="ctr"/>
-                </a:tc>
-                <a:tc>
-                  <a:txBody>
-                    <a:bodyPr/>
-                    <a:lstStyle/>
-                    <a:p>
-                      <a:pPr algn="ctr"/>
-                      <a:r>
-                        <a:rPr lang="en-US" sz="2400" dirty="0">
-                          <a:solidFill>
-                            <a:schemeClr val="tx1"/>
-                          </a:solidFill>
-                          <a:latin typeface="+mn-lt"/>
-                        </a:rPr>
-                        <a:t>10</a:t>
                       </a:r>
                     </a:p>
                   </a:txBody>
@@ -12957,20 +12978,26 @@
                         <a:defRPr/>
                       </a:pPr>
                       <a:r>
-                        <a:rPr lang="en-US" sz="2400" dirty="0">
+                        <a:rPr lang="en-US" sz="2800" dirty="0">
                           <a:solidFill>
-                            <a:srgbClr val="92D050"/>
+                            <a:schemeClr val="tx1"/>
                           </a:solidFill>
                           <a:latin typeface="+mn-lt"/>
                         </a:rPr>
-                        <a:t>⬆️</a:t>
+                        <a:t>↑</a:t>
                       </a:r>
-                    </a:p>
-                    <a:p>
-                      <a:pPr algn="ctr"/>
-                      <a:endParaRPr lang="en-US" sz="2400" dirty="0">
+                      <a:r>
+                        <a:rPr lang="en-US" sz="2800">
+                          <a:solidFill>
+                            <a:schemeClr val="tx1"/>
+                          </a:solidFill>
+                          <a:latin typeface="+mn-lt"/>
+                        </a:rPr>
+                        <a:t>10%</a:t>
+                      </a:r>
+                      <a:endParaRPr lang="en-US" sz="2800" dirty="0">
                         <a:solidFill>
-                          <a:srgbClr val="92D050"/>
+                          <a:schemeClr val="tx1"/>
                         </a:solidFill>
                         <a:latin typeface="+mn-lt"/>
                       </a:endParaRPr>
@@ -12980,11 +13007,225 @@
                 </a:tc>
                 <a:extLst>
                   <a:ext uri="{0D108BD9-81ED-4DB2-BD59-A6C34878D82A}">
-                    <a16:rowId xmlns:a16="http://schemas.microsoft.com/office/drawing/2014/main" val="3734574624"/>
+                    <a16:rowId xmlns:a16="http://schemas.microsoft.com/office/drawing/2014/main" val="2026445813"/>
                   </a:ext>
                 </a:extLst>
               </a:tr>
-              <a:tr h="929973">
+              <a:tr h="863000">
+                <a:tc>
+                  <a:txBody>
+                    <a:bodyPr/>
+                    <a:lstStyle/>
+                    <a:p>
+                      <a:r>
+                        <a:rPr lang="en-US" sz="2800" dirty="0"/>
+                        <a:t>Bend angle</a:t>
+                      </a:r>
+                      <a:endParaRPr lang="en-US" sz="2800" dirty="0">
+                        <a:latin typeface="+mn-lt"/>
+                      </a:endParaRPr>
+                    </a:p>
+                  </a:txBody>
+                  <a:tcPr anchor="ctr"/>
+                </a:tc>
+                <a:tc>
+                  <a:txBody>
+                    <a:bodyPr/>
+                    <a:lstStyle/>
+                    <a:p>
+                      <a:pPr algn="ctr"/>
+                      <a:r>
+                        <a:rPr lang="en-US" sz="2800" dirty="0">
+                          <a:latin typeface="+mn-lt"/>
+                        </a:rPr>
+                        <a:t>20</a:t>
+                      </a:r>
+                      <a:r>
+                        <a:rPr lang="en-US" sz="2800" dirty="0"/>
+                        <a:t>°</a:t>
+                      </a:r>
+                      <a:endParaRPr lang="en-US" sz="2800" dirty="0">
+                        <a:latin typeface="+mn-lt"/>
+                      </a:endParaRPr>
+                    </a:p>
+                  </a:txBody>
+                  <a:tcPr anchor="ctr"/>
+                </a:tc>
+                <a:tc>
+                  <a:txBody>
+                    <a:bodyPr/>
+                    <a:lstStyle/>
+                    <a:p>
+                      <a:pPr algn="ctr"/>
+                      <a:r>
+                        <a:rPr lang="en-US" sz="2800" dirty="0">
+                          <a:latin typeface="+mn-lt"/>
+                        </a:rPr>
+                        <a:t>29</a:t>
+                      </a:r>
+                      <a:r>
+                        <a:rPr lang="en-US" sz="2800" dirty="0"/>
+                        <a:t>°</a:t>
+                      </a:r>
+                      <a:endParaRPr lang="en-US" sz="2800" dirty="0">
+                        <a:latin typeface="+mn-lt"/>
+                      </a:endParaRPr>
+                    </a:p>
+                  </a:txBody>
+                  <a:tcPr anchor="ctr"/>
+                </a:tc>
+                <a:tc>
+                  <a:txBody>
+                    <a:bodyPr/>
+                    <a:lstStyle/>
+                    <a:p>
+                      <a:pPr marL="0" marR="0" indent="0" algn="ctr" defTabSz="4389120" rtl="0" eaLnBrk="1" fontAlgn="auto" latinLnBrk="0" hangingPunct="1">
+                        <a:lnSpc>
+                          <a:spcPct val="100000"/>
+                        </a:lnSpc>
+                        <a:spcBef>
+                          <a:spcPts val="0"/>
+                        </a:spcBef>
+                        <a:spcAft>
+                          <a:spcPts val="0"/>
+                        </a:spcAft>
+                        <a:buClrTx/>
+                        <a:buSzTx/>
+                        <a:buFontTx/>
+                        <a:buNone/>
+                        <a:tabLst/>
+                        <a:defRPr/>
+                      </a:pPr>
+                      <a:r>
+                        <a:rPr lang="en-US" sz="2800" dirty="0">
+                          <a:solidFill>
+                            <a:schemeClr val="tx1"/>
+                          </a:solidFill>
+                          <a:latin typeface="+mn-lt"/>
+                        </a:rPr>
+                        <a:t>↑45%</a:t>
+                      </a:r>
+                    </a:p>
+                  </a:txBody>
+                  <a:tcPr anchor="ctr"/>
+                </a:tc>
+                <a:extLst>
+                  <a:ext uri="{0D108BD9-81ED-4DB2-BD59-A6C34878D82A}">
+                    <a16:rowId xmlns:a16="http://schemas.microsoft.com/office/drawing/2014/main" val="667803636"/>
+                  </a:ext>
+                </a:extLst>
+              </a:tr>
+              <a:tr h="863000">
+                <a:tc>
+                  <a:txBody>
+                    <a:bodyPr/>
+                    <a:lstStyle/>
+                    <a:p>
+                      <a:r>
+                        <a:rPr lang="en-US" sz="2800" dirty="0">
+                          <a:solidFill>
+                            <a:prstClr val="black"/>
+                          </a:solidFill>
+                        </a:rPr>
+                        <a:t>Anchor radius (</a:t>
+                      </a:r>
+                      <a:r>
+                        <a:rPr lang="en-US" sz="2800" i="1" dirty="0" err="1">
+                          <a:solidFill>
+                            <a:prstClr val="black"/>
+                          </a:solidFill>
+                        </a:rPr>
+                        <a:t>r</a:t>
+                      </a:r>
+                      <a:r>
+                        <a:rPr lang="en-US" sz="2800" i="1" baseline="-25000" dirty="0" err="1">
+                          <a:solidFill>
+                            <a:prstClr val="black"/>
+                          </a:solidFill>
+                        </a:rPr>
+                        <a:t>anchor</a:t>
+                      </a:r>
+                      <a:r>
+                        <a:rPr lang="en-US" sz="2800" i="1" dirty="0">
+                          <a:solidFill>
+                            <a:prstClr val="black"/>
+                          </a:solidFill>
+                        </a:rPr>
+                        <a:t>/R</a:t>
+                      </a:r>
+                      <a:r>
+                        <a:rPr lang="en-US" sz="2800" dirty="0">
+                          <a:solidFill>
+                            <a:prstClr val="black"/>
+                          </a:solidFill>
+                        </a:rPr>
+                        <a:t>)</a:t>
+                      </a:r>
+                      <a:endParaRPr lang="en-US" sz="2800" dirty="0">
+                        <a:latin typeface="+mn-lt"/>
+                      </a:endParaRPr>
+                    </a:p>
+                  </a:txBody>
+                  <a:tcPr anchor="ctr"/>
+                </a:tc>
+                <a:tc>
+                  <a:txBody>
+                    <a:bodyPr/>
+                    <a:lstStyle/>
+                    <a:p>
+                      <a:pPr algn="ctr"/>
+                      <a:r>
+                        <a:rPr lang="en-US" sz="2800" dirty="0">
+                          <a:latin typeface="+mn-lt"/>
+                        </a:rPr>
+                        <a:t>0.55</a:t>
+                      </a:r>
+                    </a:p>
+                  </a:txBody>
+                  <a:tcPr anchor="ctr"/>
+                </a:tc>
+                <a:tc>
+                  <a:txBody>
+                    <a:bodyPr/>
+                    <a:lstStyle/>
+                    <a:p>
+                      <a:pPr algn="ctr"/>
+                      <a:r>
+                        <a:rPr lang="en-US" sz="2800" dirty="0">
+                          <a:latin typeface="+mn-lt"/>
+                        </a:rPr>
+                        <a:t>0.61</a:t>
+                      </a:r>
+                    </a:p>
+                  </a:txBody>
+                  <a:tcPr anchor="ctr"/>
+                </a:tc>
+                <a:tc>
+                  <a:txBody>
+                    <a:bodyPr/>
+                    <a:lstStyle/>
+                    <a:p>
+                      <a:pPr algn="ctr"/>
+                      <a:r>
+                        <a:rPr lang="en-US" sz="2800" dirty="0">
+                          <a:solidFill>
+                            <a:schemeClr val="tx1"/>
+                          </a:solidFill>
+                          <a:latin typeface="+mn-lt"/>
+                        </a:rPr>
+                        <a:t>↑10%</a:t>
+                      </a:r>
+                    </a:p>
+                  </a:txBody>
+                  <a:tcPr anchor="ctr"/>
+                </a:tc>
+                <a:extLst>
+                  <a:ext uri="{0D108BD9-81ED-4DB2-BD59-A6C34878D82A}">
+                    <a16:rowId xmlns:a16="http://schemas.microsoft.com/office/drawing/2014/main" val="1110870346"/>
+                  </a:ext>
+                </a:extLst>
+              </a:tr>
+              <a:tr h="863000">
                 <a:tc>
                   <a:txBody>
                     <a:bodyPr/>
@@ -13008,15 +13249,15 @@
                         <a:defRPr/>
                       </a:pPr>
                       <a:r>
-                        <a:rPr lang="en-US" sz="2400" dirty="0">
+                        <a:rPr lang="en-US" sz="2800" dirty="0">
                           <a:solidFill>
                             <a:prstClr val="black"/>
                           </a:solidFill>
                         </a:rPr>
-                        <a:t>Mean midpoint radius (</a:t>
+                        <a:t>Midpoint radius (</a:t>
                       </a:r>
                       <a:r>
-                        <a:rPr lang="en-US" sz="2400" i="1" dirty="0" err="1">
+                        <a:rPr lang="en-US" sz="2800" i="1" dirty="0" err="1">
                           <a:solidFill>
                             <a:prstClr val="black"/>
                           </a:solidFill>
@@ -13024,7 +13265,7 @@
                         <a:t>r</a:t>
                       </a:r>
                       <a:r>
-                        <a:rPr lang="en-US" sz="2400" i="1" baseline="-25000" dirty="0" err="1">
+                        <a:rPr lang="en-US" sz="2800" i="1" baseline="-25000" dirty="0" err="1">
                           <a:solidFill>
                             <a:prstClr val="black"/>
                           </a:solidFill>
@@ -13032,7 +13273,7 @@
                         <a:t>mid</a:t>
                       </a:r>
                       <a:r>
-                        <a:rPr lang="en-US" sz="2400" i="1" dirty="0">
+                        <a:rPr lang="en-US" sz="2800" i="1" dirty="0">
                           <a:solidFill>
                             <a:prstClr val="black"/>
                           </a:solidFill>
@@ -13040,18 +13281,13 @@
                         <a:t>/R</a:t>
                       </a:r>
                       <a:r>
-                        <a:rPr lang="en-US" sz="2400" dirty="0">
+                        <a:rPr lang="en-US" sz="2800" dirty="0">
                           <a:solidFill>
                             <a:prstClr val="black"/>
                           </a:solidFill>
                         </a:rPr>
                         <a:t>)</a:t>
                       </a:r>
-                    </a:p>
-                    <a:p>
-                      <a:endParaRPr lang="en-US" sz="2400" dirty="0">
-                        <a:latin typeface="+mn-lt"/>
-                      </a:endParaRPr>
                     </a:p>
                   </a:txBody>
                   <a:tcPr anchor="ctr"/>
@@ -13063,7 +13299,7 @@
                     <a:p>
                       <a:pPr algn="ctr"/>
                       <a:r>
-                        <a:rPr lang="en-US" sz="2400" dirty="0">
+                        <a:rPr lang="en-US" sz="2800" dirty="0">
                           <a:latin typeface="+mn-lt"/>
                         </a:rPr>
                         <a:t>0.57</a:t>
@@ -13079,7 +13315,7 @@
                     <a:p>
                       <a:pPr algn="ctr"/>
                       <a:r>
-                        <a:rPr lang="en-US" sz="2400" dirty="0">
+                        <a:rPr lang="en-US" sz="2800" dirty="0">
                           <a:latin typeface="+mn-lt"/>
                         </a:rPr>
                         <a:t>0.65</a:t>
@@ -13095,69 +13331,25 @@
                     <a:p>
                       <a:pPr algn="ctr"/>
                       <a:r>
-                        <a:rPr lang="en-US" sz="2400" dirty="0">
+                        <a:rPr lang="en-US" sz="2800" dirty="0">
                           <a:solidFill>
                             <a:schemeClr val="tx1"/>
                           </a:solidFill>
                           <a:latin typeface="+mn-lt"/>
                         </a:rPr>
-                        <a:t>14</a:t>
+                        <a:t>↑14%</a:t>
                       </a:r>
-                    </a:p>
-                  </a:txBody>
-                  <a:tcPr anchor="ctr"/>
-                </a:tc>
-                <a:tc>
-                  <a:txBody>
-                    <a:bodyPr/>
-                    <a:lstStyle/>
-                    <a:p>
-                      <a:pPr marL="0" marR="0" lvl="0" indent="0" algn="ctr" defTabSz="4389120" rtl="0" eaLnBrk="1" fontAlgn="auto" latinLnBrk="0" hangingPunct="1">
-                        <a:lnSpc>
-                          <a:spcPct val="100000"/>
-                        </a:lnSpc>
-                        <a:spcBef>
-                          <a:spcPts val="0"/>
-                        </a:spcBef>
-                        <a:spcAft>
-                          <a:spcPts val="0"/>
-                        </a:spcAft>
-                        <a:buClrTx/>
-                        <a:buSzTx/>
-                        <a:buFontTx/>
-                        <a:buNone/>
-                        <a:tabLst/>
-                        <a:defRPr/>
-                      </a:pPr>
-                      <a:r>
-                        <a:rPr lang="en-US" sz="2400" dirty="0">
-                          <a:solidFill>
-                            <a:srgbClr val="92D050"/>
-                          </a:solidFill>
-                          <a:latin typeface="+mn-lt"/>
-                        </a:rPr>
-                        <a:t>⬆️</a:t>
-                      </a:r>
-                    </a:p>
-                    <a:p>
-                      <a:pPr algn="ctr"/>
-                      <a:endParaRPr lang="en-US" sz="2400" dirty="0">
-                        <a:solidFill>
-                          <a:srgbClr val="92D050"/>
-                        </a:solidFill>
-                        <a:latin typeface="+mn-lt"/>
-                      </a:endParaRPr>
                     </a:p>
                   </a:txBody>
                   <a:tcPr anchor="ctr"/>
                 </a:tc>
                 <a:extLst>
                   <a:ext uri="{0D108BD9-81ED-4DB2-BD59-A6C34878D82A}">
-                    <a16:rowId xmlns:a16="http://schemas.microsoft.com/office/drawing/2014/main" val="1099156181"/>
+                    <a16:rowId xmlns:a16="http://schemas.microsoft.com/office/drawing/2014/main" val="3734574624"/>
                   </a:ext>
                 </a:extLst>
               </a:tr>
-              <a:tr h="929973">
+              <a:tr h="863000">
                 <a:tc>
                   <a:txBody>
                     <a:bodyPr/>
@@ -13181,15 +13373,15 @@
                         <a:defRPr/>
                       </a:pPr>
                       <a:r>
-                        <a:rPr lang="en-US" sz="2400" dirty="0">
+                        <a:rPr lang="en-US" sz="2800" dirty="0">
                           <a:solidFill>
                             <a:prstClr val="black"/>
                           </a:solidFill>
                         </a:rPr>
-                        <a:t>Mean tip radius (</a:t>
+                        <a:t>Tip radius (</a:t>
                       </a:r>
                       <a:r>
-                        <a:rPr lang="en-US" sz="2400" i="1" dirty="0" err="1">
+                        <a:rPr lang="en-US" sz="2800" i="1" dirty="0" err="1">
                           <a:solidFill>
                             <a:prstClr val="black"/>
                           </a:solidFill>
@@ -13197,15 +13389,15 @@
                         <a:t>r</a:t>
                       </a:r>
                       <a:r>
-                        <a:rPr lang="en-US" sz="2400" i="1" baseline="-25000" dirty="0" err="1">
+                        <a:rPr lang="en-US" sz="2800" i="1" baseline="-25000" dirty="0" err="1">
                           <a:solidFill>
                             <a:prstClr val="black"/>
                           </a:solidFill>
                         </a:rPr>
-                        <a:t>tip</a:t>
+                        <a:t>tipr</a:t>
                       </a:r>
                       <a:r>
-                        <a:rPr lang="en-US" sz="2400" i="1" dirty="0">
+                        <a:rPr lang="en-US" sz="2800" i="1" dirty="0">
                           <a:solidFill>
                             <a:prstClr val="black"/>
                           </a:solidFill>
@@ -13213,18 +13405,13 @@
                         <a:t>/R</a:t>
                       </a:r>
                       <a:r>
-                        <a:rPr lang="en-US" sz="2400" dirty="0">
+                        <a:rPr lang="en-US" sz="2800" dirty="0">
                           <a:solidFill>
                             <a:prstClr val="black"/>
                           </a:solidFill>
                         </a:rPr>
                         <a:t>)</a:t>
                       </a:r>
-                    </a:p>
-                    <a:p>
-                      <a:endParaRPr lang="en-US" sz="2400" dirty="0">
-                        <a:latin typeface="+mn-lt"/>
-                      </a:endParaRPr>
                     </a:p>
                   </a:txBody>
                   <a:tcPr anchor="ctr"/>
@@ -13236,7 +13423,7 @@
                     <a:p>
                       <a:pPr algn="ctr"/>
                       <a:r>
-                        <a:rPr lang="en-US" sz="2400" dirty="0">
+                        <a:rPr lang="en-US" sz="2800" dirty="0">
                           <a:latin typeface="+mn-lt"/>
                         </a:rPr>
                         <a:t>0.54</a:t>
@@ -13252,7 +13439,7 @@
                     <a:p>
                       <a:pPr algn="ctr"/>
                       <a:r>
-                        <a:rPr lang="en-US" sz="2400" dirty="0">
+                        <a:rPr lang="en-US" sz="2800" dirty="0">
                           <a:latin typeface="+mn-lt"/>
                         </a:rPr>
                         <a:t>0.54</a:t>
@@ -13268,32 +13455,13 @@
                     <a:p>
                       <a:pPr algn="ctr"/>
                       <a:r>
-                        <a:rPr lang="en-US" sz="2400" dirty="0">
+                        <a:rPr lang="en-US" sz="2800" dirty="0">
                           <a:solidFill>
                             <a:schemeClr val="tx1"/>
                           </a:solidFill>
                           <a:latin typeface="+mn-lt"/>
                         </a:rPr>
-                        <a:t>0</a:t>
-                      </a:r>
-                    </a:p>
-                  </a:txBody>
-                  <a:tcPr anchor="ctr"/>
-                </a:tc>
-                <a:tc>
-                  <a:txBody>
-                    <a:bodyPr/>
-                    <a:lstStyle/>
-                    <a:p>
-                      <a:pPr algn="ctr"/>
-                      <a:r>
-                        <a:rPr lang="en-US" sz="2400" dirty="0">
-                          <a:solidFill>
-                            <a:schemeClr val="tx1"/>
-                          </a:solidFill>
-                          <a:latin typeface="+mn-lt"/>
-                        </a:rPr>
-                        <a:t>🟰</a:t>
+                        <a:t>no change</a:t>
                       </a:r>
                     </a:p>
                   </a:txBody>
@@ -13301,218 +13469,7 @@
                 </a:tc>
                 <a:extLst>
                   <a:ext uri="{0D108BD9-81ED-4DB2-BD59-A6C34878D82A}">
-                    <a16:rowId xmlns:a16="http://schemas.microsoft.com/office/drawing/2014/main" val="3469137795"/>
-                  </a:ext>
-                </a:extLst>
-              </a:tr>
-              <a:tr h="929973">
-                <a:tc>
-                  <a:txBody>
-                    <a:bodyPr/>
-                    <a:lstStyle/>
-                    <a:p>
-                      <a:r>
-                        <a:rPr lang="en-US" sz="2400" dirty="0"/>
-                        <a:t>Local chain bend angle (°)</a:t>
-                      </a:r>
-                      <a:endParaRPr lang="en-US" sz="2400" dirty="0">
-                        <a:latin typeface="+mn-lt"/>
-                      </a:endParaRPr>
-                    </a:p>
-                  </a:txBody>
-                  <a:tcPr anchor="ctr"/>
-                </a:tc>
-                <a:tc>
-                  <a:txBody>
-                    <a:bodyPr/>
-                    <a:lstStyle/>
-                    <a:p>
-                      <a:pPr algn="ctr"/>
-                      <a:r>
-                        <a:rPr lang="en-US" sz="2400" dirty="0">
-                          <a:latin typeface="+mn-lt"/>
-                        </a:rPr>
-                        <a:t>20</a:t>
-                      </a:r>
-                    </a:p>
-                  </a:txBody>
-                  <a:tcPr anchor="ctr"/>
-                </a:tc>
-                <a:tc>
-                  <a:txBody>
-                    <a:bodyPr/>
-                    <a:lstStyle/>
-                    <a:p>
-                      <a:pPr algn="ctr"/>
-                      <a:r>
-                        <a:rPr lang="en-US" sz="2400" dirty="0">
-                          <a:latin typeface="+mn-lt"/>
-                        </a:rPr>
-                        <a:t>29</a:t>
-                      </a:r>
-                    </a:p>
-                  </a:txBody>
-                  <a:tcPr anchor="ctr"/>
-                </a:tc>
-                <a:tc>
-                  <a:txBody>
-                    <a:bodyPr/>
-                    <a:lstStyle/>
-                    <a:p>
-                      <a:pPr algn="ctr"/>
-                      <a:r>
-                        <a:rPr lang="en-US" sz="2400" dirty="0">
-                          <a:solidFill>
-                            <a:schemeClr val="tx1"/>
-                          </a:solidFill>
-                          <a:latin typeface="+mn-lt"/>
-                        </a:rPr>
-                        <a:t>45</a:t>
-                      </a:r>
-                    </a:p>
-                  </a:txBody>
-                  <a:tcPr anchor="ctr"/>
-                </a:tc>
-                <a:tc>
-                  <a:txBody>
-                    <a:bodyPr/>
-                    <a:lstStyle/>
-                    <a:p>
-                      <a:pPr marL="0" marR="0" lvl="0" indent="0" algn="ctr" defTabSz="4389120" rtl="0" eaLnBrk="1" fontAlgn="auto" latinLnBrk="0" hangingPunct="1">
-                        <a:lnSpc>
-                          <a:spcPct val="100000"/>
-                        </a:lnSpc>
-                        <a:spcBef>
-                          <a:spcPts val="0"/>
-                        </a:spcBef>
-                        <a:spcAft>
-                          <a:spcPts val="0"/>
-                        </a:spcAft>
-                        <a:buClrTx/>
-                        <a:buSzTx/>
-                        <a:buFontTx/>
-                        <a:buNone/>
-                        <a:tabLst/>
-                        <a:defRPr/>
-                      </a:pPr>
-                      <a:r>
-                        <a:rPr lang="en-US" sz="2400" dirty="0">
-                          <a:solidFill>
-                            <a:srgbClr val="92D050"/>
-                          </a:solidFill>
-                          <a:latin typeface="+mn-lt"/>
-                        </a:rPr>
-                        <a:t>⬆️</a:t>
-                      </a:r>
-                    </a:p>
-                    <a:p>
-                      <a:pPr algn="ctr"/>
-                      <a:endParaRPr lang="en-US" sz="2400" dirty="0">
-                        <a:solidFill>
-                          <a:srgbClr val="92D050"/>
-                        </a:solidFill>
-                        <a:latin typeface="+mn-lt"/>
-                      </a:endParaRPr>
-                    </a:p>
-                  </a:txBody>
-                  <a:tcPr anchor="ctr"/>
-                </a:tc>
-                <a:extLst>
-                  <a:ext uri="{0D108BD9-81ED-4DB2-BD59-A6C34878D82A}">
-                    <a16:rowId xmlns:a16="http://schemas.microsoft.com/office/drawing/2014/main" val="3965104998"/>
-                  </a:ext>
-                </a:extLst>
-              </a:tr>
-              <a:tr h="929973">
-                <a:tc>
-                  <a:txBody>
-                    <a:bodyPr/>
-                    <a:lstStyle/>
-                    <a:p>
-                      <a:r>
-                        <a:rPr lang="en-US" sz="2400" dirty="0"/>
-                        <a:t>Chain count</a:t>
-                      </a:r>
-                      <a:endParaRPr lang="en-US" sz="2400" dirty="0">
-                        <a:latin typeface="+mn-lt"/>
-                      </a:endParaRPr>
-                    </a:p>
-                  </a:txBody>
-                  <a:tcPr anchor="ctr"/>
-                </a:tc>
-                <a:tc>
-                  <a:txBody>
-                    <a:bodyPr/>
-                    <a:lstStyle/>
-                    <a:p>
-                      <a:pPr algn="ctr"/>
-                      <a:r>
-                        <a:rPr lang="en-US" sz="2400" dirty="0">
-                          <a:latin typeface="+mn-lt"/>
-                        </a:rPr>
-                        <a:t>154</a:t>
-                      </a:r>
-                    </a:p>
-                  </a:txBody>
-                  <a:tcPr anchor="ctr"/>
-                </a:tc>
-                <a:tc>
-                  <a:txBody>
-                    <a:bodyPr/>
-                    <a:lstStyle/>
-                    <a:p>
-                      <a:pPr algn="ctr"/>
-                      <a:r>
-                        <a:rPr lang="en-US" sz="2400" dirty="0">
-                          <a:latin typeface="+mn-lt"/>
-                        </a:rPr>
-                        <a:t>66</a:t>
-                      </a:r>
-                    </a:p>
-                  </a:txBody>
-                  <a:tcPr anchor="ctr"/>
-                </a:tc>
-                <a:tc>
-                  <a:txBody>
-                    <a:bodyPr/>
-                    <a:lstStyle/>
-                    <a:p>
-                      <a:pPr algn="ctr"/>
-                      <a:r>
-                        <a:rPr lang="en-US" sz="2400" dirty="0">
-                          <a:solidFill>
-                            <a:schemeClr val="tx1"/>
-                          </a:solidFill>
-                          <a:latin typeface="+mn-lt"/>
-                        </a:rPr>
-                        <a:t>-43</a:t>
-                      </a:r>
-                    </a:p>
-                  </a:txBody>
-                  <a:tcPr anchor="ctr"/>
-                </a:tc>
-                <a:tc>
-                  <a:txBody>
-                    <a:bodyPr/>
-                    <a:lstStyle/>
-                    <a:p>
-                      <a:pPr algn="ctr"/>
-                      <a:r>
-                        <a:rPr lang="en-US" sz="2400" dirty="0">
-                          <a:solidFill>
-                            <a:srgbClr val="0070C0"/>
-                          </a:solidFill>
-                          <a:latin typeface="+mn-lt"/>
-                        </a:rPr>
-                        <a:t>⬇️</a:t>
-                      </a:r>
-                    </a:p>
-                  </a:txBody>
-                  <a:tcPr anchor="ctr"/>
-                </a:tc>
-                <a:extLst>
-                  <a:ext uri="{0D108BD9-81ED-4DB2-BD59-A6C34878D82A}">
-                    <a16:rowId xmlns:a16="http://schemas.microsoft.com/office/drawing/2014/main" val="2499680286"/>
+                    <a16:rowId xmlns:a16="http://schemas.microsoft.com/office/drawing/2014/main" val="1099156181"/>
                   </a:ext>
                 </a:extLst>
               </a:tr>
@@ -13520,6 +13477,237 @@
           </a:graphicData>
         </a:graphic>
       </p:graphicFrame>
+      <p:sp>
+        <p:nvSpPr>
+          <p:cNvPr id="30" name="Text Box 193">
+            <a:extLst>
+              <a:ext uri="{FF2B5EF4-FFF2-40B4-BE49-F238E27FC236}">
+                <a16:creationId xmlns:a16="http://schemas.microsoft.com/office/drawing/2014/main" id="{E8909A76-C5F7-EF74-899F-9ABF238A616B}"/>
+              </a:ext>
+            </a:extLst>
+          </p:cNvPr>
+          <p:cNvSpPr txBox="1">
+            <a:spLocks noChangeArrowheads="1"/>
+          </p:cNvSpPr>
+          <p:nvPr/>
+        </p:nvSpPr>
+        <p:spPr bwMode="auto">
+          <a:xfrm>
+            <a:off x="29046467" y="30517041"/>
+            <a:ext cx="12787333" cy="7695241"/>
+          </a:xfrm>
+          <a:prstGeom prst="rect">
+            <a:avLst/>
+          </a:prstGeom>
+          <a:solidFill>
+            <a:schemeClr val="bg1"/>
+          </a:solidFill>
+          <a:ln w="12700">
+            <a:solidFill>
+              <a:schemeClr val="accent1">
+                <a:lumMod val="75000"/>
+              </a:schemeClr>
+            </a:solidFill>
+          </a:ln>
+          <a:effectLst/>
+        </p:spPr>
+        <p:txBody>
+          <a:bodyPr lIns="182880" tIns="182880" rIns="182880" bIns="182880">
+            <a:noAutofit/>
+          </a:bodyPr>
+          <a:lstStyle>
+            <a:lvl1pPr eaLnBrk="0" hangingPunct="0">
+              <a:defRPr sz="2200">
+                <a:solidFill>
+                  <a:schemeClr val="tx1"/>
+                </a:solidFill>
+                <a:latin typeface="Arial" charset="0"/>
+              </a:defRPr>
+            </a:lvl1pPr>
+            <a:lvl2pPr marL="742950" indent="-285750" eaLnBrk="0" hangingPunct="0">
+              <a:defRPr sz="2200">
+                <a:solidFill>
+                  <a:schemeClr val="tx1"/>
+                </a:solidFill>
+                <a:latin typeface="Arial" charset="0"/>
+              </a:defRPr>
+            </a:lvl2pPr>
+            <a:lvl3pPr marL="1143000" indent="-228600" eaLnBrk="0" hangingPunct="0">
+              <a:defRPr sz="2200">
+                <a:solidFill>
+                  <a:schemeClr val="tx1"/>
+                </a:solidFill>
+                <a:latin typeface="Arial" charset="0"/>
+              </a:defRPr>
+            </a:lvl3pPr>
+            <a:lvl4pPr marL="1600200" indent="-228600" eaLnBrk="0" hangingPunct="0">
+              <a:defRPr sz="2200">
+                <a:solidFill>
+                  <a:schemeClr val="tx1"/>
+                </a:solidFill>
+                <a:latin typeface="Arial" charset="0"/>
+              </a:defRPr>
+            </a:lvl4pPr>
+            <a:lvl5pPr marL="2057400" indent="-228600" eaLnBrk="0" hangingPunct="0">
+              <a:defRPr sz="2200">
+                <a:solidFill>
+                  <a:schemeClr val="tx1"/>
+                </a:solidFill>
+                <a:latin typeface="Arial" charset="0"/>
+              </a:defRPr>
+            </a:lvl5pPr>
+            <a:lvl6pPr marL="2514600" indent="-228600" eaLnBrk="0" fontAlgn="base" hangingPunct="0">
+              <a:spcBef>
+                <a:spcPct val="0"/>
+              </a:spcBef>
+              <a:spcAft>
+                <a:spcPct val="0"/>
+              </a:spcAft>
+              <a:defRPr sz="2200">
+                <a:solidFill>
+                  <a:schemeClr val="tx1"/>
+                </a:solidFill>
+                <a:latin typeface="Arial" charset="0"/>
+              </a:defRPr>
+            </a:lvl6pPr>
+            <a:lvl7pPr marL="2971800" indent="-228600" eaLnBrk="0" fontAlgn="base" hangingPunct="0">
+              <a:spcBef>
+                <a:spcPct val="0"/>
+              </a:spcBef>
+              <a:spcAft>
+                <a:spcPct val="0"/>
+              </a:spcAft>
+              <a:defRPr sz="2200">
+                <a:solidFill>
+                  <a:schemeClr val="tx1"/>
+                </a:solidFill>
+                <a:latin typeface="Arial" charset="0"/>
+              </a:defRPr>
+            </a:lvl7pPr>
+            <a:lvl8pPr marL="3429000" indent="-228600" eaLnBrk="0" fontAlgn="base" hangingPunct="0">
+              <a:spcBef>
+                <a:spcPct val="0"/>
+              </a:spcBef>
+              <a:spcAft>
+                <a:spcPct val="0"/>
+              </a:spcAft>
+              <a:defRPr sz="2200">
+                <a:solidFill>
+                  <a:schemeClr val="tx1"/>
+                </a:solidFill>
+                <a:latin typeface="Arial" charset="0"/>
+              </a:defRPr>
+            </a:lvl8pPr>
+            <a:lvl9pPr marL="3886200" indent="-228600" eaLnBrk="0" fontAlgn="base" hangingPunct="0">
+              <a:spcBef>
+                <a:spcPct val="0"/>
+              </a:spcBef>
+              <a:spcAft>
+                <a:spcPct val="0"/>
+              </a:spcAft>
+              <a:defRPr sz="2200">
+                <a:solidFill>
+                  <a:schemeClr val="tx1"/>
+                </a:solidFill>
+                <a:latin typeface="Arial" charset="0"/>
+              </a:defRPr>
+            </a:lvl9pPr>
+          </a:lstStyle>
+          <a:p>
+            <a:r>
+              <a:rPr lang="en-US" sz="4800" b="1" i="1" dirty="0">
+                <a:latin typeface="+mn-lt"/>
+              </a:rPr>
+              <a:t>Friction reorganizes the force-chain backbone. </a:t>
+            </a:r>
+          </a:p>
+          <a:p>
+            <a:r>
+              <a:rPr lang="en-US" sz="4800" i="1" dirty="0">
+                <a:latin typeface="+mn-lt"/>
+              </a:rPr>
+              <a:t>Increased friction produces a more anisotropic and spatially distributed force-chain architecture.</a:t>
+            </a:r>
+            <a:endParaRPr lang="en-US" sz="4800" dirty="0">
+              <a:latin typeface="+mn-lt"/>
+            </a:endParaRPr>
+          </a:p>
+          <a:p>
+            <a:r>
+              <a:rPr lang="en-US" sz="4800" b="1" i="1" dirty="0">
+                <a:latin typeface="+mn-lt"/>
+              </a:rPr>
+              <a:t>Higher friction produces:</a:t>
+            </a:r>
+          </a:p>
+          <a:p>
+            <a:pPr marL="571500" indent="-571500">
+              <a:buFont typeface="Arial" panose="020B0604020202020204" pitchFamily="34" charset="0"/>
+              <a:buChar char="•"/>
+            </a:pPr>
+            <a:r>
+              <a:rPr lang="en-US" sz="4800" dirty="0">
+                <a:latin typeface="+mn-lt"/>
+              </a:rPr>
+              <a:t>taller, steeper piles</a:t>
+            </a:r>
+          </a:p>
+          <a:p>
+            <a:pPr marL="571500" indent="-571500">
+              <a:buFont typeface="Arial" panose="020B0604020202020204" pitchFamily="34" charset="0"/>
+              <a:buChar char="•"/>
+            </a:pPr>
+            <a:r>
+              <a:rPr lang="en-US" sz="4800" dirty="0">
+                <a:latin typeface="+mn-lt"/>
+              </a:rPr>
+              <a:t>fewer but more connected force chains</a:t>
+            </a:r>
+          </a:p>
+          <a:p>
+            <a:pPr marL="571500" indent="-571500">
+              <a:buFont typeface="Arial" panose="020B0604020202020204" pitchFamily="34" charset="0"/>
+              <a:buChar char="•"/>
+            </a:pPr>
+            <a:r>
+              <a:rPr lang="en-US" sz="4800" dirty="0">
+                <a:latin typeface="+mn-lt"/>
+              </a:rPr>
+              <a:t>larger bend angles </a:t>
+            </a:r>
+          </a:p>
+          <a:p>
+            <a:pPr marL="571500" indent="-571500">
+              <a:buFont typeface="Arial" panose="020B0604020202020204" pitchFamily="34" charset="0"/>
+              <a:buChar char="•"/>
+            </a:pPr>
+            <a:r>
+              <a:rPr lang="en-US" sz="4800" dirty="0">
+                <a:latin typeface="+mn-lt"/>
+              </a:rPr>
+              <a:t>outward migration of load-bearing pathways</a:t>
+            </a:r>
+          </a:p>
+          <a:p>
+            <a:pPr marL="571500" indent="-571500">
+              <a:buFont typeface="Arial" panose="020B0604020202020204" pitchFamily="34" charset="0"/>
+              <a:buChar char="•"/>
+            </a:pPr>
+            <a:r>
+              <a:rPr lang="en-US" sz="4800" dirty="0">
+                <a:latin typeface="+mn-lt"/>
+              </a:rPr>
+              <a:t>Force transmission becomes less centralized and more distributed.</a:t>
+            </a:r>
+          </a:p>
+          <a:p>
+            <a:pPr eaLnBrk="1" hangingPunct="1"/>
+            <a:endParaRPr lang="en-US" sz="4000" dirty="0">
+              <a:latin typeface="+mn-lt"/>
+            </a:endParaRPr>
+          </a:p>
+        </p:txBody>
+      </p:sp>
     </p:spTree>
     <p:extLst>
       <p:ext uri="{BB962C8B-B14F-4D97-AF65-F5344CB8AC3E}">
